--- a/web-proj.pptx
+++ b/web-proj.pptx
@@ -2759,9 +2759,33 @@
 <p:sldMaster xmlns:a="http://schemas.openxmlformats.org/drawingml/2006/main" xmlns:r="http://schemas.openxmlformats.org/officeDocument/2006/relationships" xmlns:p="http://schemas.openxmlformats.org/presentationml/2006/main">
   <p:cSld>
     <p:bg>
-      <p:bgRef idx="1001">
-        <a:schemeClr val="bg1"/>
-      </p:bgRef>
+      <p:bgPr>
+        <a:gradFill flip="none" rotWithShape="1">
+          <a:gsLst>
+            <a:gs pos="0">
+              <a:schemeClr val="accent5">
+                <a:lumMod val="5000"/>
+                <a:lumOff val="95000"/>
+              </a:schemeClr>
+            </a:gs>
+            <a:gs pos="85000">
+              <a:srgbClr val="00B0F0">
+                <a:lumMod val="94000"/>
+                <a:lumOff val="6000"/>
+                <a:alpha val="25000"/>
+              </a:srgbClr>
+            </a:gs>
+            <a:gs pos="100000">
+              <a:srgbClr val="00B0F0">
+                <a:alpha val="65000"/>
+              </a:srgbClr>
+            </a:gs>
+          </a:gsLst>
+          <a:lin ang="5400000" scaled="1"/>
+          <a:tileRect/>
+        </a:gradFill>
+        <a:effectLst/>
+      </p:bgPr>
     </p:bg>
     <p:spTree>
       <p:nvGrpSpPr>
@@ -3367,22 +3391,37 @@
           <a:lstStyle/>
           <a:p>
             <a:r>
-              <a:rPr lang="en-US" dirty="0" err="1"/>
+              <a:rPr lang="en-US" dirty="0" err="1">
+                <a:latin typeface="Segoe UI" panose="020B0502040204020203" pitchFamily="34" charset="0"/>
+                <a:cs typeface="Segoe UI" panose="020B0502040204020203" pitchFamily="34" charset="0"/>
+              </a:rPr>
               <a:t>localStorage</a:t>
             </a:r>
             <a:r>
-              <a:rPr lang="ru-RU" dirty="0"/>
+              <a:rPr lang="ru-RU" dirty="0">
+                <a:latin typeface="Segoe UI" panose="020B0502040204020203" pitchFamily="34" charset="0"/>
+                <a:cs typeface="Segoe UI" panose="020B0502040204020203" pitchFamily="34" charset="0"/>
+              </a:rPr>
               <a:t> и</a:t>
             </a:r>
             <a:r>
-              <a:rPr lang="en-US" dirty="0"/>
+              <a:rPr lang="en-US" dirty="0">
+                <a:latin typeface="Segoe UI" panose="020B0502040204020203" pitchFamily="34" charset="0"/>
+                <a:cs typeface="Segoe UI" panose="020B0502040204020203" pitchFamily="34" charset="0"/>
+              </a:rPr>
               <a:t> </a:t>
             </a:r>
             <a:r>
-              <a:rPr lang="en-US" dirty="0" err="1"/>
+              <a:rPr lang="en-US" dirty="0" err="1">
+                <a:latin typeface="Segoe UI" panose="020B0502040204020203" pitchFamily="34" charset="0"/>
+                <a:cs typeface="Segoe UI" panose="020B0502040204020203" pitchFamily="34" charset="0"/>
+              </a:rPr>
               <a:t>sessionStorage</a:t>
             </a:r>
-            <a:endParaRPr lang="ru-RU" dirty="0"/>
+            <a:endParaRPr lang="ru-RU" dirty="0">
+              <a:latin typeface="Segoe UI" panose="020B0502040204020203" pitchFamily="34" charset="0"/>
+              <a:cs typeface="Segoe UI" panose="020B0502040204020203" pitchFamily="34" charset="0"/>
+            </a:endParaRPr>
           </a:p>
         </p:txBody>
       </p:sp>
@@ -3507,14 +3546,50 @@
           <a:lstStyle/>
           <a:p>
             <a:r>
-              <a:rPr lang="ru-RU" dirty="0"/>
+              <a:rPr lang="ru-RU" b="1" dirty="0">
+                <a:ln w="22225">
+                  <a:solidFill>
+                    <a:srgbClr val="7030A0"/>
+                  </a:solidFill>
+                  <a:prstDash val="solid"/>
+                </a:ln>
+                <a:solidFill>
+                  <a:srgbClr val="2FCEF9"/>
+                </a:solidFill>
+                <a:latin typeface="Segoe UI" panose="020B0502040204020203" pitchFamily="34" charset="0"/>
+                <a:cs typeface="Segoe UI" panose="020B0502040204020203" pitchFamily="34" charset="0"/>
+              </a:rPr>
               <a:t>Событие </a:t>
             </a:r>
             <a:r>
-              <a:rPr lang="en-US" dirty="0"/>
+              <a:rPr lang="en-US" b="1" dirty="0">
+                <a:ln w="22225">
+                  <a:solidFill>
+                    <a:srgbClr val="7030A0"/>
+                  </a:solidFill>
+                  <a:prstDash val="solid"/>
+                </a:ln>
+                <a:solidFill>
+                  <a:srgbClr val="2FCEF9"/>
+                </a:solidFill>
+                <a:latin typeface="Segoe UI" panose="020B0502040204020203" pitchFamily="34" charset="0"/>
+                <a:cs typeface="Segoe UI" panose="020B0502040204020203" pitchFamily="34" charset="0"/>
+              </a:rPr>
               <a:t>storage</a:t>
             </a:r>
-            <a:endParaRPr lang="ru-RU" dirty="0"/>
+            <a:endParaRPr lang="ru-RU" b="1" dirty="0">
+              <a:ln w="22225">
+                <a:solidFill>
+                  <a:srgbClr val="7030A0"/>
+                </a:solidFill>
+                <a:prstDash val="solid"/>
+              </a:ln>
+              <a:solidFill>
+                <a:srgbClr val="2FCEF9"/>
+              </a:solidFill>
+              <a:latin typeface="Segoe UI" panose="020B0502040204020203" pitchFamily="34" charset="0"/>
+              <a:cs typeface="Segoe UI" panose="020B0502040204020203" pitchFamily="34" charset="0"/>
+            </a:endParaRPr>
           </a:p>
         </p:txBody>
       </p:sp>
@@ -3537,7 +3612,7 @@
         <p:spPr/>
         <p:txBody>
           <a:bodyPr>
-            <a:normAutofit fontScale="92500" lnSpcReduction="20000"/>
+            <a:normAutofit fontScale="85000" lnSpcReduction="20000"/>
           </a:bodyPr>
           <a:lstStyle/>
           <a:p>
@@ -3590,6 +3665,12 @@
             <a:pPr marL="0" indent="0">
               <a:buNone/>
             </a:pPr>
+            <a:endParaRPr lang="ru-RU" dirty="0"/>
+          </a:p>
+          <a:p>
+            <a:pPr marL="0" indent="0">
+              <a:buNone/>
+            </a:pPr>
             <a:r>
               <a:rPr lang="ru-RU" dirty="0"/>
               <a:t>Когда обновляются данные в </a:t>
@@ -3620,125 +3701,57 @@
             </a:r>
           </a:p>
           <a:p>
-            <a:pPr marL="0" lvl="0" indent="0">
-              <a:buNone/>
-            </a:pPr>
             <a:r>
               <a:rPr lang="ru-RU" dirty="0" err="1"/>
               <a:t>key</a:t>
             </a:r>
             <a:r>
               <a:rPr lang="ru-RU" dirty="0"/>
-              <a:t> – ключ, который обновился (</a:t>
-            </a:r>
-            <a:r>
-              <a:rPr lang="ru-RU" dirty="0" err="1"/>
-              <a:t>null</a:t>
-            </a:r>
-            <a:r>
-              <a:rPr lang="ru-RU" dirty="0"/>
-              <a:t>, если вызван .</a:t>
-            </a:r>
-            <a:r>
-              <a:rPr lang="ru-RU" dirty="0" err="1"/>
-              <a:t>clear</a:t>
-            </a:r>
-            <a:r>
-              <a:rPr lang="ru-RU" dirty="0"/>
-              <a:t>()).</a:t>
-            </a:r>
-          </a:p>
-          <a:p>
-            <a:pPr marL="0" lvl="0" indent="0">
-              <a:buNone/>
-            </a:pPr>
+              <a:t> </a:t>
+            </a:r>
+          </a:p>
+          <a:p>
             <a:r>
               <a:rPr lang="ru-RU" dirty="0" err="1"/>
               <a:t>oldValue</a:t>
             </a:r>
             <a:r>
               <a:rPr lang="ru-RU" dirty="0"/>
-              <a:t> – старое значение (</a:t>
-            </a:r>
-            <a:r>
-              <a:rPr lang="ru-RU" dirty="0" err="1"/>
-              <a:t>null</a:t>
-            </a:r>
-            <a:r>
-              <a:rPr lang="ru-RU" dirty="0"/>
-              <a:t>, если ключ добавлен впервые).</a:t>
-            </a:r>
-          </a:p>
-          <a:p>
-            <a:pPr marL="0" lvl="0" indent="0">
-              <a:buNone/>
-            </a:pPr>
+              <a:t> </a:t>
+            </a:r>
+          </a:p>
+          <a:p>
             <a:r>
               <a:rPr lang="ru-RU" dirty="0" err="1"/>
               <a:t>newValue</a:t>
             </a:r>
             <a:r>
               <a:rPr lang="ru-RU" dirty="0"/>
-              <a:t> – новое значение (</a:t>
-            </a:r>
-            <a:r>
-              <a:rPr lang="ru-RU" dirty="0" err="1"/>
-              <a:t>null</a:t>
-            </a:r>
-            <a:r>
-              <a:rPr lang="ru-RU" dirty="0"/>
-              <a:t>, если ключ был удалён).</a:t>
-            </a:r>
-          </a:p>
-          <a:p>
-            <a:pPr marL="0" lvl="0" indent="0">
-              <a:buNone/>
-            </a:pPr>
+              <a:t> </a:t>
+            </a:r>
+          </a:p>
+          <a:p>
             <a:r>
               <a:rPr lang="ru-RU" dirty="0" err="1"/>
               <a:t>url</a:t>
             </a:r>
             <a:r>
               <a:rPr lang="ru-RU" dirty="0"/>
-              <a:t> – </a:t>
-            </a:r>
-            <a:r>
-              <a:rPr lang="ru-RU" dirty="0" err="1"/>
-              <a:t>url</a:t>
-            </a:r>
-            <a:r>
-              <a:rPr lang="ru-RU" dirty="0"/>
-              <a:t> документа, где произошло обновление.</a:t>
-            </a:r>
-          </a:p>
-          <a:p>
-            <a:pPr marL="0" lvl="0" indent="0">
-              <a:buNone/>
-            </a:pPr>
+              <a:t> </a:t>
+            </a:r>
+          </a:p>
+          <a:p>
             <a:r>
               <a:rPr lang="ru-RU" dirty="0" err="1"/>
               <a:t>storageArea</a:t>
             </a:r>
-            <a:r>
-              <a:rPr lang="ru-RU" dirty="0"/>
-              <a:t> – объект </a:t>
-            </a:r>
-            <a:r>
-              <a:rPr lang="ru-RU" dirty="0" err="1"/>
-              <a:t>localStorage</a:t>
-            </a:r>
-            <a:r>
-              <a:rPr lang="ru-RU" dirty="0"/>
-              <a:t> или </a:t>
-            </a:r>
-            <a:r>
-              <a:rPr lang="ru-RU" dirty="0" err="1"/>
-              <a:t>sessionStorage</a:t>
-            </a:r>
-            <a:r>
-              <a:rPr lang="ru-RU" dirty="0"/>
-              <a:t>, где произошло обновление.</a:t>
-            </a:r>
+            <a:endParaRPr lang="ru-RU" dirty="0"/>
+          </a:p>
+          <a:p>
+            <a:pPr marL="0" lvl="0" indent="0">
+              <a:buNone/>
+            </a:pPr>
+            <a:endParaRPr lang="ru-RU" dirty="0"/>
           </a:p>
           <a:p>
             <a:pPr marL="0" indent="0">
@@ -3819,11 +3832,25 @@
         </p:nvSpPr>
         <p:spPr/>
         <p:txBody>
-          <a:bodyPr/>
-          <a:lstStyle/>
-          <a:p>
-            <a:r>
-              <a:rPr lang="ru-RU" dirty="0"/>
+          <a:bodyPr>
+            <a:normAutofit/>
+          </a:bodyPr>
+          <a:lstStyle/>
+          <a:p>
+            <a:r>
+              <a:rPr lang="ru-RU" b="1" dirty="0">
+                <a:ln w="22225">
+                  <a:solidFill>
+                    <a:srgbClr val="7030A0"/>
+                  </a:solidFill>
+                  <a:prstDash val="solid"/>
+                </a:ln>
+                <a:solidFill>
+                  <a:srgbClr val="2FCEF9"/>
+                </a:solidFill>
+                <a:latin typeface="Segoe UI" panose="020B0502040204020203" pitchFamily="34" charset="0"/>
+                <a:cs typeface="Segoe UI" panose="020B0502040204020203" pitchFamily="34" charset="0"/>
+              </a:rPr>
               <a:t>Пример кода:</a:t>
             </a:r>
           </a:p>
@@ -3848,7 +3875,7 @@
         <p:spPr/>
         <p:txBody>
           <a:bodyPr>
-            <a:normAutofit fontScale="70000" lnSpcReduction="20000"/>
+            <a:normAutofit fontScale="85000" lnSpcReduction="20000"/>
           </a:bodyPr>
           <a:lstStyle/>
           <a:p>
@@ -3872,93 +3899,36 @@
             <a:pPr marL="0" indent="0">
               <a:buNone/>
             </a:pPr>
-            <a:r>
-              <a:rPr lang="ru-RU" dirty="0"/>
-              <a:t>// срабатывает при обновлениях, сделанных в том же хранилище из других документов</a:t>
-            </a:r>
-          </a:p>
-          <a:p>
-            <a:pPr marL="0" indent="0">
-              <a:buNone/>
-            </a:pPr>
-            <a:r>
-              <a:rPr lang="en-US" dirty="0" err="1"/>
-              <a:t>window.onstorage</a:t>
-            </a:r>
-            <a:r>
-              <a:rPr lang="en-US" dirty="0"/>
-              <a:t> = event =&gt; { // </a:t>
-            </a:r>
-            <a:r>
-              <a:rPr lang="ru-RU" dirty="0"/>
-              <a:t>можно также использовать</a:t>
-            </a:r>
-            <a:r>
-              <a:rPr lang="en-US" dirty="0"/>
-              <a:t> </a:t>
-            </a:r>
-            <a:r>
-              <a:rPr lang="en-US" dirty="0" err="1"/>
-              <a:t>window.addEventListener</a:t>
-            </a:r>
-            <a:r>
-              <a:rPr lang="en-US" dirty="0"/>
-              <a:t>('storage', event =&gt; {</a:t>
-            </a:r>
             <a:endParaRPr lang="ru-RU" dirty="0"/>
           </a:p>
           <a:p>
             <a:pPr marL="0" indent="0">
               <a:buNone/>
             </a:pPr>
-            <a:r>
-              <a:rPr lang="en-US" dirty="0"/>
-              <a:t>  if (</a:t>
-            </a:r>
-            <a:r>
-              <a:rPr lang="en-US" dirty="0" err="1"/>
-              <a:t>event.key</a:t>
-            </a:r>
-            <a:r>
-              <a:rPr lang="en-US" dirty="0"/>
-              <a:t> != 'now') return;</a:t>
-            </a:r>
             <a:endParaRPr lang="ru-RU" dirty="0"/>
           </a:p>
           <a:p>
             <a:pPr marL="0" indent="0">
               <a:buNone/>
             </a:pPr>
-            <a:r>
-              <a:rPr lang="en-US" dirty="0"/>
-              <a:t>  alert(</a:t>
-            </a:r>
-            <a:r>
-              <a:rPr lang="en-US" dirty="0" err="1"/>
-              <a:t>event.key</a:t>
-            </a:r>
-            <a:r>
-              <a:rPr lang="en-US" dirty="0"/>
-              <a:t> + ':' + </a:t>
-            </a:r>
-            <a:r>
-              <a:rPr lang="en-US" dirty="0" err="1"/>
-              <a:t>event.newValue</a:t>
-            </a:r>
-            <a:r>
-              <a:rPr lang="en-US" dirty="0"/>
-              <a:t> + " at " + event.url);</a:t>
-            </a:r>
             <a:endParaRPr lang="ru-RU" dirty="0"/>
           </a:p>
           <a:p>
             <a:pPr marL="0" indent="0">
               <a:buNone/>
             </a:pPr>
-            <a:r>
-              <a:rPr lang="en-US" dirty="0"/>
-              <a:t>};</a:t>
-            </a:r>
+            <a:endParaRPr lang="ru-RU" dirty="0"/>
+          </a:p>
+          <a:p>
+            <a:pPr marL="0" indent="0">
+              <a:buNone/>
+            </a:pPr>
+            <a:endParaRPr lang="ru-RU" dirty="0"/>
+          </a:p>
+          <a:p>
+            <a:pPr marL="0" indent="0">
+              <a:buNone/>
+            </a:pPr>
             <a:endParaRPr lang="ru-RU" dirty="0"/>
           </a:p>
           <a:p>
@@ -3975,32 +3945,6 @@
             <a:pPr marL="0" indent="0">
               <a:buNone/>
             </a:pPr>
-            <a:r>
-              <a:rPr lang="en-US" dirty="0" err="1"/>
-              <a:t>localStorage.setItem</a:t>
-            </a:r>
-            <a:r>
-              <a:rPr lang="en-US" dirty="0"/>
-              <a:t>('now', </a:t>
-            </a:r>
-            <a:r>
-              <a:rPr lang="en-US" dirty="0" err="1"/>
-              <a:t>Date.now</a:t>
-            </a:r>
-            <a:r>
-              <a:rPr lang="en-US" dirty="0"/>
-              <a:t>());</a:t>
-            </a:r>
-            <a:endParaRPr lang="ru-RU" dirty="0"/>
-          </a:p>
-          <a:p>
-            <a:pPr marL="0" indent="0">
-              <a:buNone/>
-            </a:pPr>
-            <a:r>
-              <a:rPr lang="en-US" dirty="0"/>
-              <a:t> </a:t>
-            </a:r>
             <a:endParaRPr lang="ru-RU" dirty="0"/>
           </a:p>
           <a:p>
@@ -4019,6 +3963,339 @@
               <a:rPr lang="ru-RU" dirty="0"/>
               <a:t>, то каждое из них будет реагировать на обновления, произошедшие в другом окне.</a:t>
             </a:r>
+          </a:p>
+        </p:txBody>
+      </p:sp>
+      <p:sp>
+        <p:nvSpPr>
+          <p:cNvPr id="9" name="TextBox 8">
+            <a:extLst>
+              <a:ext uri="{FF2B5EF4-FFF2-40B4-BE49-F238E27FC236}">
+                <a16:creationId xmlns:a16="http://schemas.microsoft.com/office/drawing/2014/main" id="{69D72A4B-4622-4BD0-B3E2-DF7422AFB4F9}"/>
+              </a:ext>
+            </a:extLst>
+          </p:cNvPr>
+          <p:cNvSpPr txBox="1"/>
+          <p:nvPr/>
+        </p:nvSpPr>
+        <p:spPr>
+          <a:xfrm>
+            <a:off x="838200" y="2624019"/>
+            <a:ext cx="10144760" cy="2554545"/>
+          </a:xfrm>
+          <a:prstGeom prst="rect">
+            <a:avLst/>
+          </a:prstGeom>
+          <a:solidFill>
+            <a:schemeClr val="accent1">
+              <a:lumMod val="20000"/>
+              <a:lumOff val="80000"/>
+            </a:schemeClr>
+          </a:solidFill>
+        </p:spPr>
+        <p:txBody>
+          <a:bodyPr wrap="square">
+            <a:spAutoFit/>
+          </a:bodyPr>
+          <a:lstStyle/>
+          <a:p>
+            <a:pPr marL="0" indent="0">
+              <a:buNone/>
+            </a:pPr>
+            <a:r>
+              <a:rPr lang="ru-RU" sz="2000" dirty="0">
+                <a:solidFill>
+                  <a:schemeClr val="accent1">
+                    <a:lumMod val="50000"/>
+                  </a:schemeClr>
+                </a:solidFill>
+              </a:rPr>
+              <a:t>// Срабатывает при обновлениях, сделанных в том же хранилище из других документов</a:t>
+            </a:r>
+          </a:p>
+          <a:p>
+            <a:pPr marL="0" indent="0">
+              <a:buNone/>
+            </a:pPr>
+            <a:r>
+              <a:rPr lang="en-US" sz="2000" dirty="0" err="1">
+                <a:solidFill>
+                  <a:schemeClr val="accent1">
+                    <a:lumMod val="50000"/>
+                  </a:schemeClr>
+                </a:solidFill>
+              </a:rPr>
+              <a:t>window.onstorage</a:t>
+            </a:r>
+            <a:r>
+              <a:rPr lang="en-US" sz="2000" dirty="0">
+                <a:solidFill>
+                  <a:schemeClr val="accent1">
+                    <a:lumMod val="50000"/>
+                  </a:schemeClr>
+                </a:solidFill>
+              </a:rPr>
+              <a:t> = event =&gt; { // </a:t>
+            </a:r>
+            <a:r>
+              <a:rPr lang="ru-RU" sz="2000" dirty="0">
+                <a:solidFill>
+                  <a:schemeClr val="accent1">
+                    <a:lumMod val="50000"/>
+                  </a:schemeClr>
+                </a:solidFill>
+              </a:rPr>
+              <a:t>можно также использовать</a:t>
+            </a:r>
+            <a:r>
+              <a:rPr lang="en-US" sz="2000" dirty="0">
+                <a:solidFill>
+                  <a:schemeClr val="accent1">
+                    <a:lumMod val="50000"/>
+                  </a:schemeClr>
+                </a:solidFill>
+              </a:rPr>
+              <a:t> </a:t>
+            </a:r>
+            <a:endParaRPr lang="ru-RU" sz="2000" dirty="0">
+              <a:solidFill>
+                <a:schemeClr val="accent1">
+                  <a:lumMod val="50000"/>
+                </a:schemeClr>
+              </a:solidFill>
+            </a:endParaRPr>
+          </a:p>
+          <a:p>
+            <a:pPr marL="0" indent="0">
+              <a:buNone/>
+            </a:pPr>
+            <a:r>
+              <a:rPr lang="en-US" sz="2000" dirty="0" err="1">
+                <a:solidFill>
+                  <a:schemeClr val="accent1">
+                    <a:lumMod val="50000"/>
+                  </a:schemeClr>
+                </a:solidFill>
+              </a:rPr>
+              <a:t>window.addEventListener</a:t>
+            </a:r>
+            <a:r>
+              <a:rPr lang="en-US" sz="2000" dirty="0">
+                <a:solidFill>
+                  <a:schemeClr val="accent1">
+                    <a:lumMod val="50000"/>
+                  </a:schemeClr>
+                </a:solidFill>
+              </a:rPr>
+              <a:t>('storage', event =&gt; {</a:t>
+            </a:r>
+            <a:endParaRPr lang="ru-RU" sz="2000" dirty="0">
+              <a:solidFill>
+                <a:schemeClr val="accent1">
+                  <a:lumMod val="50000"/>
+                </a:schemeClr>
+              </a:solidFill>
+            </a:endParaRPr>
+          </a:p>
+          <a:p>
+            <a:pPr marL="0" indent="0">
+              <a:buNone/>
+            </a:pPr>
+            <a:r>
+              <a:rPr lang="en-US" sz="2000" dirty="0">
+                <a:solidFill>
+                  <a:schemeClr val="accent1">
+                    <a:lumMod val="50000"/>
+                  </a:schemeClr>
+                </a:solidFill>
+              </a:rPr>
+              <a:t>  if (</a:t>
+            </a:r>
+            <a:r>
+              <a:rPr lang="en-US" sz="2000" dirty="0" err="1">
+                <a:solidFill>
+                  <a:schemeClr val="accent1">
+                    <a:lumMod val="50000"/>
+                  </a:schemeClr>
+                </a:solidFill>
+              </a:rPr>
+              <a:t>event.key</a:t>
+            </a:r>
+            <a:r>
+              <a:rPr lang="en-US" sz="2000" dirty="0">
+                <a:solidFill>
+                  <a:schemeClr val="accent1">
+                    <a:lumMod val="50000"/>
+                  </a:schemeClr>
+                </a:solidFill>
+              </a:rPr>
+              <a:t> != 'now') return;</a:t>
+            </a:r>
+            <a:endParaRPr lang="ru-RU" sz="2000" dirty="0">
+              <a:solidFill>
+                <a:schemeClr val="accent1">
+                  <a:lumMod val="50000"/>
+                </a:schemeClr>
+              </a:solidFill>
+            </a:endParaRPr>
+          </a:p>
+          <a:p>
+            <a:pPr marL="0" indent="0">
+              <a:buNone/>
+            </a:pPr>
+            <a:r>
+              <a:rPr lang="en-US" sz="2000" dirty="0">
+                <a:solidFill>
+                  <a:schemeClr val="accent1">
+                    <a:lumMod val="50000"/>
+                  </a:schemeClr>
+                </a:solidFill>
+              </a:rPr>
+              <a:t>  alert(</a:t>
+            </a:r>
+            <a:r>
+              <a:rPr lang="en-US" sz="2000" dirty="0" err="1">
+                <a:solidFill>
+                  <a:schemeClr val="accent1">
+                    <a:lumMod val="50000"/>
+                  </a:schemeClr>
+                </a:solidFill>
+              </a:rPr>
+              <a:t>event.key</a:t>
+            </a:r>
+            <a:r>
+              <a:rPr lang="en-US" sz="2000" dirty="0">
+                <a:solidFill>
+                  <a:schemeClr val="accent1">
+                    <a:lumMod val="50000"/>
+                  </a:schemeClr>
+                </a:solidFill>
+              </a:rPr>
+              <a:t> + ':' + </a:t>
+            </a:r>
+            <a:r>
+              <a:rPr lang="en-US" sz="2000" dirty="0" err="1">
+                <a:solidFill>
+                  <a:schemeClr val="accent1">
+                    <a:lumMod val="50000"/>
+                  </a:schemeClr>
+                </a:solidFill>
+              </a:rPr>
+              <a:t>event.newValue</a:t>
+            </a:r>
+            <a:r>
+              <a:rPr lang="en-US" sz="2000" dirty="0">
+                <a:solidFill>
+                  <a:schemeClr val="accent1">
+                    <a:lumMod val="50000"/>
+                  </a:schemeClr>
+                </a:solidFill>
+              </a:rPr>
+              <a:t> + " at " + event.url);</a:t>
+            </a:r>
+            <a:endParaRPr lang="ru-RU" sz="2000" dirty="0">
+              <a:solidFill>
+                <a:schemeClr val="accent1">
+                  <a:lumMod val="50000"/>
+                </a:schemeClr>
+              </a:solidFill>
+            </a:endParaRPr>
+          </a:p>
+          <a:p>
+            <a:pPr marL="0" indent="0">
+              <a:buNone/>
+            </a:pPr>
+            <a:r>
+              <a:rPr lang="en-US" sz="2000" dirty="0">
+                <a:solidFill>
+                  <a:schemeClr val="accent1">
+                    <a:lumMod val="50000"/>
+                  </a:schemeClr>
+                </a:solidFill>
+              </a:rPr>
+              <a:t>};</a:t>
+            </a:r>
+            <a:endParaRPr lang="ru-RU" sz="2000" dirty="0">
+              <a:solidFill>
+                <a:schemeClr val="accent1">
+                  <a:lumMod val="50000"/>
+                </a:schemeClr>
+              </a:solidFill>
+            </a:endParaRPr>
+          </a:p>
+          <a:p>
+            <a:pPr marL="0" indent="0">
+              <a:buNone/>
+            </a:pPr>
+            <a:r>
+              <a:rPr lang="en-US" sz="2000" dirty="0">
+                <a:solidFill>
+                  <a:schemeClr val="accent1">
+                    <a:lumMod val="50000"/>
+                  </a:schemeClr>
+                </a:solidFill>
+              </a:rPr>
+              <a:t> </a:t>
+            </a:r>
+            <a:endParaRPr lang="ru-RU" sz="2000" dirty="0">
+              <a:solidFill>
+                <a:schemeClr val="accent1">
+                  <a:lumMod val="50000"/>
+                </a:schemeClr>
+              </a:solidFill>
+            </a:endParaRPr>
+          </a:p>
+          <a:p>
+            <a:pPr marL="0" indent="0">
+              <a:buNone/>
+            </a:pPr>
+            <a:r>
+              <a:rPr lang="en-US" sz="2000" dirty="0" err="1">
+                <a:solidFill>
+                  <a:schemeClr val="accent1">
+                    <a:lumMod val="50000"/>
+                  </a:schemeClr>
+                </a:solidFill>
+              </a:rPr>
+              <a:t>localStorage.setItem</a:t>
+            </a:r>
+            <a:r>
+              <a:rPr lang="en-US" sz="2000" dirty="0">
+                <a:solidFill>
+                  <a:schemeClr val="accent1">
+                    <a:lumMod val="50000"/>
+                  </a:schemeClr>
+                </a:solidFill>
+              </a:rPr>
+              <a:t>('now', </a:t>
+            </a:r>
+            <a:r>
+              <a:rPr lang="en-US" sz="2000" dirty="0" err="1">
+                <a:solidFill>
+                  <a:schemeClr val="accent1">
+                    <a:lumMod val="50000"/>
+                  </a:schemeClr>
+                </a:solidFill>
+              </a:rPr>
+              <a:t>Date.now</a:t>
+            </a:r>
+            <a:r>
+              <a:rPr lang="en-US" sz="2000" dirty="0">
+                <a:solidFill>
+                  <a:schemeClr val="accent1">
+                    <a:lumMod val="50000"/>
+                  </a:schemeClr>
+                </a:solidFill>
+              </a:rPr>
+              <a:t>());</a:t>
+            </a:r>
+            <a:endParaRPr lang="ru-RU" sz="2000" dirty="0">
+              <a:solidFill>
+                <a:schemeClr val="accent1">
+                  <a:lumMod val="50000"/>
+                </a:schemeClr>
+              </a:solidFill>
+            </a:endParaRPr>
           </a:p>
         </p:txBody>
       </p:sp>
@@ -4070,43 +4347,71 @@
         </p:nvSpPr>
         <p:spPr/>
         <p:txBody>
+          <a:bodyPr>
+            <a:normAutofit/>
+          </a:bodyPr>
+          <a:lstStyle/>
+          <a:p>
+            <a:r>
+              <a:rPr lang="ru-RU" b="1" dirty="0">
+                <a:ln w="22225">
+                  <a:solidFill>
+                    <a:srgbClr val="7030A0"/>
+                  </a:solidFill>
+                  <a:prstDash val="solid"/>
+                </a:ln>
+                <a:solidFill>
+                  <a:srgbClr val="2FCEF9"/>
+                </a:solidFill>
+                <a:latin typeface="Segoe UI" panose="020B0502040204020203" pitchFamily="34" charset="0"/>
+                <a:cs typeface="Segoe UI" panose="020B0502040204020203" pitchFamily="34" charset="0"/>
+              </a:rPr>
+              <a:t>Безопасность</a:t>
+            </a:r>
+          </a:p>
+        </p:txBody>
+      </p:sp>
+      <p:sp>
+        <p:nvSpPr>
+          <p:cNvPr id="3" name="Объект 2">
+            <a:extLst>
+              <a:ext uri="{FF2B5EF4-FFF2-40B4-BE49-F238E27FC236}">
+                <a16:creationId xmlns:a16="http://schemas.microsoft.com/office/drawing/2014/main" id="{B9A8E5F3-FC46-D7BA-E8F1-DB4D702105A9}"/>
+              </a:ext>
+            </a:extLst>
+          </p:cNvPr>
+          <p:cNvSpPr>
+            <a:spLocks noGrp="1"/>
+          </p:cNvSpPr>
+          <p:nvPr>
+            <p:ph idx="1"/>
+          </p:nvPr>
+        </p:nvSpPr>
+        <p:spPr/>
+        <p:txBody>
           <a:bodyPr/>
           <a:lstStyle/>
           <a:p>
+            <a:pPr marL="0" indent="0">
+              <a:buNone/>
+            </a:pPr>
             <a:r>
               <a:rPr lang="ru-RU" dirty="0"/>
-              <a:t>Безопасность</a:t>
-            </a:r>
-          </a:p>
-        </p:txBody>
-      </p:sp>
-      <p:sp>
-        <p:nvSpPr>
-          <p:cNvPr id="3" name="Объект 2">
-            <a:extLst>
-              <a:ext uri="{FF2B5EF4-FFF2-40B4-BE49-F238E27FC236}">
-                <a16:creationId xmlns:a16="http://schemas.microsoft.com/office/drawing/2014/main" id="{B9A8E5F3-FC46-D7BA-E8F1-DB4D702105A9}"/>
-              </a:ext>
-            </a:extLst>
-          </p:cNvPr>
-          <p:cNvSpPr>
-            <a:spLocks noGrp="1"/>
-          </p:cNvSpPr>
-          <p:nvPr>
-            <p:ph idx="1"/>
-          </p:nvPr>
-        </p:nvSpPr>
-        <p:spPr/>
-        <p:txBody>
-          <a:bodyPr/>
-          <a:lstStyle/>
-          <a:p>
+              <a:t>Все хранилища потенциально уязвимы для </a:t>
+            </a:r>
+            <a:r>
+              <a:rPr lang="ru-RU" dirty="0" err="1"/>
+              <a:t>XSS</a:t>
+            </a:r>
             <a:r>
               <a:rPr lang="ru-RU" dirty="0"/>
-              <a:t>Все хранилища потенциально уязвимы для XSS-атак</a:t>
-            </a:r>
-          </a:p>
-          <a:p>
+              <a:t>-атак.</a:t>
+            </a:r>
+          </a:p>
+          <a:p>
+            <a:pPr marL="0" indent="0">
+              <a:buNone/>
+            </a:pPr>
             <a:r>
               <a:rPr lang="ru-RU" dirty="0"/>
               <a:t>В </a:t>
@@ -4170,37 +4475,54 @@
         </p:nvSpPr>
         <p:spPr/>
         <p:txBody>
+          <a:bodyPr>
+            <a:normAutofit/>
+          </a:bodyPr>
+          <a:lstStyle/>
+          <a:p>
+            <a:r>
+              <a:rPr lang="ru-RU" b="1" dirty="0">
+                <a:ln w="22225">
+                  <a:solidFill>
+                    <a:srgbClr val="7030A0"/>
+                  </a:solidFill>
+                  <a:prstDash val="solid"/>
+                </a:ln>
+                <a:solidFill>
+                  <a:srgbClr val="2FCEF9"/>
+                </a:solidFill>
+                <a:latin typeface="Segoe UI" panose="020B0502040204020203" pitchFamily="34" charset="0"/>
+                <a:cs typeface="Segoe UI" panose="020B0502040204020203" pitchFamily="34" charset="0"/>
+              </a:rPr>
+              <a:t>Итог</a:t>
+            </a:r>
+          </a:p>
+        </p:txBody>
+      </p:sp>
+      <p:sp>
+        <p:nvSpPr>
+          <p:cNvPr id="3" name="Объект 2">
+            <a:extLst>
+              <a:ext uri="{FF2B5EF4-FFF2-40B4-BE49-F238E27FC236}">
+                <a16:creationId xmlns:a16="http://schemas.microsoft.com/office/drawing/2014/main" id="{9B4665D6-38B9-F61E-0A50-4B5F6CCB2F3D}"/>
+              </a:ext>
+            </a:extLst>
+          </p:cNvPr>
+          <p:cNvSpPr>
+            <a:spLocks noGrp="1"/>
+          </p:cNvSpPr>
+          <p:nvPr>
+            <p:ph idx="1"/>
+          </p:nvPr>
+        </p:nvSpPr>
+        <p:spPr/>
+        <p:txBody>
           <a:bodyPr/>
           <a:lstStyle/>
           <a:p>
-            <a:r>
-              <a:rPr lang="ru-RU" dirty="0"/>
-              <a:t>Итог</a:t>
-            </a:r>
-          </a:p>
-        </p:txBody>
-      </p:sp>
-      <p:sp>
-        <p:nvSpPr>
-          <p:cNvPr id="3" name="Объект 2">
-            <a:extLst>
-              <a:ext uri="{FF2B5EF4-FFF2-40B4-BE49-F238E27FC236}">
-                <a16:creationId xmlns:a16="http://schemas.microsoft.com/office/drawing/2014/main" id="{9B4665D6-38B9-F61E-0A50-4B5F6CCB2F3D}"/>
-              </a:ext>
-            </a:extLst>
-          </p:cNvPr>
-          <p:cNvSpPr>
-            <a:spLocks noGrp="1"/>
-          </p:cNvSpPr>
-          <p:nvPr>
-            <p:ph idx="1"/>
-          </p:nvPr>
-        </p:nvSpPr>
-        <p:spPr/>
-        <p:txBody>
-          <a:bodyPr/>
-          <a:lstStyle/>
-          <a:p>
+            <a:pPr marL="0" indent="0">
+              <a:buNone/>
+            </a:pPr>
             <a:r>
               <a:rPr lang="ru-RU" dirty="0"/>
               <a:t>После появления пятой версии HTML (2017 г.) </a:t>
@@ -4215,9 +4537,12 @@
             </a:r>
           </a:p>
           <a:p>
+            <a:pPr marL="0" indent="0">
+              <a:buNone/>
+            </a:pPr>
             <a:r>
               <a:rPr lang="ru-RU" dirty="0"/>
-              <a:t>При этом инструмент поддерживает синхронизацию данных, когда пользователь открывает приложение в разных вкладках (например, через событие </a:t>
+              <a:t>При этом инструмент поддерживает синхронизацию данных, когда пользователь открывает приложение в разных вкладках (через событие </a:t>
             </a:r>
             <a:r>
               <a:rPr lang="en-US" dirty="0"/>
@@ -4225,7 +4550,7 @@
             </a:r>
             <a:r>
               <a:rPr lang="ru-RU" dirty="0"/>
-              <a:t>)</a:t>
+              <a:t>).</a:t>
             </a:r>
           </a:p>
         </p:txBody>
@@ -4278,11 +4603,25 @@
         </p:nvSpPr>
         <p:spPr/>
         <p:txBody>
-          <a:bodyPr/>
-          <a:lstStyle/>
-          <a:p>
-            <a:r>
-              <a:rPr lang="ru-RU" dirty="0"/>
+          <a:bodyPr>
+            <a:normAutofit/>
+          </a:bodyPr>
+          <a:lstStyle/>
+          <a:p>
+            <a:r>
+              <a:rPr lang="ru-RU" b="1" dirty="0">
+                <a:ln w="22225">
+                  <a:solidFill>
+                    <a:srgbClr val="7030A0"/>
+                  </a:solidFill>
+                  <a:prstDash val="solid"/>
+                </a:ln>
+                <a:solidFill>
+                  <a:srgbClr val="2FCEF9"/>
+                </a:solidFill>
+                <a:latin typeface="Segoe UI" panose="020B0502040204020203" pitchFamily="34" charset="0"/>
+                <a:cs typeface="Segoe UI" panose="020B0502040204020203" pitchFamily="34" charset="0"/>
+              </a:rPr>
               <a:t>Практическая часть</a:t>
             </a:r>
           </a:p>
@@ -4412,13 +4751,21 @@
           <a:lstStyle/>
           <a:p>
             <a:r>
-              <a:rPr lang="ru-RU" dirty="0"/>
+              <a:rPr lang="ru-RU" b="1" dirty="0">
+                <a:ln w="22225">
+                  <a:solidFill>
+                    <a:srgbClr val="7030A0"/>
+                  </a:solidFill>
+                  <a:prstDash val="solid"/>
+                </a:ln>
+                <a:solidFill>
+                  <a:srgbClr val="2FCEF9"/>
+                </a:solidFill>
+                <a:latin typeface="Segoe UI" panose="020B0502040204020203" pitchFamily="34" charset="0"/>
+                <a:cs typeface="Segoe UI" panose="020B0502040204020203" pitchFamily="34" charset="0"/>
+              </a:rPr>
               <a:t>Список использованных ресурсов:</a:t>
             </a:r>
-            <a:br>
-              <a:rPr lang="ru-RU" dirty="0"/>
-            </a:br>
-            <a:endParaRPr lang="ru-RU" dirty="0"/>
           </a:p>
         </p:txBody>
       </p:sp>
@@ -4438,7 +4785,12 @@
             <p:ph idx="1"/>
           </p:nvPr>
         </p:nvSpPr>
-        <p:spPr/>
+        <p:spPr>
+          <a:xfrm>
+            <a:off x="838200" y="1876425"/>
+            <a:ext cx="10515600" cy="4351338"/>
+          </a:xfrm>
+        </p:spPr>
         <p:txBody>
           <a:bodyPr/>
           <a:lstStyle/>
@@ -4677,11 +5029,25 @@
         </p:nvSpPr>
         <p:spPr/>
         <p:txBody>
-          <a:bodyPr/>
-          <a:lstStyle/>
-          <a:p>
-            <a:r>
-              <a:rPr lang="ru-RU" dirty="0"/>
+          <a:bodyPr>
+            <a:normAutofit/>
+          </a:bodyPr>
+          <a:lstStyle/>
+          <a:p>
+            <a:r>
+              <a:rPr lang="ru-RU" b="1" dirty="0">
+                <a:ln w="22225">
+                  <a:solidFill>
+                    <a:srgbClr val="7030A0"/>
+                  </a:solidFill>
+                  <a:prstDash val="solid"/>
+                </a:ln>
+                <a:solidFill>
+                  <a:srgbClr val="2FCEF9"/>
+                </a:solidFill>
+                <a:latin typeface="Segoe UI" panose="020B0502040204020203" pitchFamily="34" charset="0"/>
+                <a:cs typeface="Segoe UI" panose="020B0502040204020203" pitchFamily="34" charset="0"/>
+              </a:rPr>
               <a:t>Введение</a:t>
             </a:r>
           </a:p>
@@ -4803,10 +5169,34 @@
           <a:lstStyle/>
           <a:p>
             <a:r>
-              <a:rPr lang="en-US" dirty="0"/>
+              <a:rPr lang="en-US" b="1" dirty="0">
+                <a:ln w="22225">
+                  <a:solidFill>
+                    <a:srgbClr val="7030A0"/>
+                  </a:solidFill>
+                  <a:prstDash val="solid"/>
+                </a:ln>
+                <a:solidFill>
+                  <a:srgbClr val="2FCEF9"/>
+                </a:solidFill>
+                <a:latin typeface="Segoe UI" panose="020B0502040204020203" pitchFamily="34" charset="0"/>
+                <a:cs typeface="Segoe UI" panose="020B0502040204020203" pitchFamily="34" charset="0"/>
+              </a:rPr>
               <a:t>Cookies</a:t>
             </a:r>
-            <a:endParaRPr lang="ru-RU" dirty="0"/>
+            <a:endParaRPr lang="ru-RU" b="1" dirty="0">
+              <a:ln w="22225">
+                <a:solidFill>
+                  <a:srgbClr val="7030A0"/>
+                </a:solidFill>
+                <a:prstDash val="solid"/>
+              </a:ln>
+              <a:solidFill>
+                <a:srgbClr val="2FCEF9"/>
+              </a:solidFill>
+              <a:latin typeface="Segoe UI" panose="020B0502040204020203" pitchFamily="34" charset="0"/>
+              <a:cs typeface="Segoe UI" panose="020B0502040204020203" pitchFamily="34" charset="0"/>
+            </a:endParaRPr>
           </a:p>
         </p:txBody>
       </p:sp>
@@ -4908,73 +5298,146 @@
             <p:ph type="title"/>
           </p:nvPr>
         </p:nvSpPr>
-        <p:spPr/>
+        <p:spPr>
+          <a:xfrm>
+            <a:off x="838200" y="365125"/>
+            <a:ext cx="11424920" cy="1325563"/>
+          </a:xfrm>
+        </p:spPr>
         <p:txBody>
           <a:bodyPr/>
           <a:lstStyle/>
           <a:p>
             <a:r>
+              <a:rPr lang="ru-RU" b="1" dirty="0">
+                <a:ln w="22225">
+                  <a:solidFill>
+                    <a:srgbClr val="7030A0"/>
+                  </a:solidFill>
+                  <a:prstDash val="solid"/>
+                </a:ln>
+                <a:solidFill>
+                  <a:srgbClr val="2FCEF9"/>
+                </a:solidFill>
+                <a:latin typeface="Segoe UI" panose="020B0502040204020203" pitchFamily="34" charset="0"/>
+                <a:cs typeface="Segoe UI" panose="020B0502040204020203" pitchFamily="34" charset="0"/>
+              </a:rPr>
+              <a:t>Объекты </a:t>
+            </a:r>
+            <a:r>
+              <a:rPr lang="en-US" b="1" dirty="0" err="1">
+                <a:ln w="22225">
+                  <a:solidFill>
+                    <a:srgbClr val="7030A0"/>
+                  </a:solidFill>
+                  <a:prstDash val="solid"/>
+                </a:ln>
+                <a:solidFill>
+                  <a:srgbClr val="2FCEF9"/>
+                </a:solidFill>
+                <a:latin typeface="Segoe UI" panose="020B0502040204020203" pitchFamily="34" charset="0"/>
+                <a:cs typeface="Segoe UI" panose="020B0502040204020203" pitchFamily="34" charset="0"/>
+              </a:rPr>
+              <a:t>localStorage</a:t>
+            </a:r>
+            <a:r>
+              <a:rPr lang="en-US" b="1" dirty="0">
+                <a:ln w="22225">
+                  <a:solidFill>
+                    <a:srgbClr val="7030A0"/>
+                  </a:solidFill>
+                  <a:prstDash val="solid"/>
+                </a:ln>
+                <a:solidFill>
+                  <a:srgbClr val="2FCEF9"/>
+                </a:solidFill>
+                <a:latin typeface="Segoe UI" panose="020B0502040204020203" pitchFamily="34" charset="0"/>
+                <a:cs typeface="Segoe UI" panose="020B0502040204020203" pitchFamily="34" charset="0"/>
+              </a:rPr>
+              <a:t> </a:t>
+            </a:r>
+            <a:r>
+              <a:rPr lang="ru-RU" b="1" dirty="0">
+                <a:ln w="22225">
+                  <a:solidFill>
+                    <a:srgbClr val="7030A0"/>
+                  </a:solidFill>
+                  <a:prstDash val="solid"/>
+                </a:ln>
+                <a:solidFill>
+                  <a:srgbClr val="2FCEF9"/>
+                </a:solidFill>
+                <a:latin typeface="Segoe UI" panose="020B0502040204020203" pitchFamily="34" charset="0"/>
+                <a:cs typeface="Segoe UI" panose="020B0502040204020203" pitchFamily="34" charset="0"/>
+              </a:rPr>
+              <a:t>и </a:t>
+            </a:r>
+            <a:r>
+              <a:rPr lang="en-US" b="1" dirty="0" err="1">
+                <a:ln w="22225">
+                  <a:solidFill>
+                    <a:srgbClr val="7030A0"/>
+                  </a:solidFill>
+                  <a:prstDash val="solid"/>
+                </a:ln>
+                <a:solidFill>
+                  <a:srgbClr val="2FCEF9"/>
+                </a:solidFill>
+                <a:latin typeface="Segoe UI" panose="020B0502040204020203" pitchFamily="34" charset="0"/>
+                <a:cs typeface="Segoe UI" panose="020B0502040204020203" pitchFamily="34" charset="0"/>
+              </a:rPr>
+              <a:t>sessionStorage</a:t>
+            </a:r>
+            <a:endParaRPr lang="ru-RU" b="1" dirty="0">
+              <a:ln w="22225">
+                <a:solidFill>
+                  <a:srgbClr val="7030A0"/>
+                </a:solidFill>
+                <a:prstDash val="solid"/>
+              </a:ln>
+              <a:solidFill>
+                <a:srgbClr val="2FCEF9"/>
+              </a:solidFill>
+              <a:latin typeface="Segoe UI" panose="020B0502040204020203" pitchFamily="34" charset="0"/>
+              <a:cs typeface="Segoe UI" panose="020B0502040204020203" pitchFamily="34" charset="0"/>
+            </a:endParaRPr>
+          </a:p>
+        </p:txBody>
+      </p:sp>
+      <p:sp>
+        <p:nvSpPr>
+          <p:cNvPr id="3" name="Объект 2">
+            <a:extLst>
+              <a:ext uri="{FF2B5EF4-FFF2-40B4-BE49-F238E27FC236}">
+                <a16:creationId xmlns:a16="http://schemas.microsoft.com/office/drawing/2014/main" id="{88582A90-6D27-BD81-218B-32F632CE3066}"/>
+              </a:ext>
+            </a:extLst>
+          </p:cNvPr>
+          <p:cNvSpPr>
+            <a:spLocks noGrp="1"/>
+          </p:cNvSpPr>
+          <p:nvPr>
+            <p:ph idx="1"/>
+          </p:nvPr>
+        </p:nvSpPr>
+        <p:spPr>
+          <a:xfrm>
+            <a:off x="838200" y="2008505"/>
+            <a:ext cx="10515600" cy="4351338"/>
+          </a:xfrm>
+        </p:spPr>
+        <p:txBody>
+          <a:bodyPr>
+            <a:normAutofit fontScale="92500" lnSpcReduction="10000"/>
+          </a:bodyPr>
+          <a:lstStyle/>
+          <a:p>
+            <a:pPr marL="0" indent="0">
+              <a:buNone/>
+            </a:pPr>
+            <a:r>
               <a:rPr lang="ru-RU" dirty="0"/>
-              <a:t>Объекты </a:t>
-            </a:r>
-            <a:r>
-              <a:rPr lang="en-US" dirty="0" err="1"/>
-              <a:t>localStorage</a:t>
-            </a:r>
-            <a:r>
-              <a:rPr lang="en-US" dirty="0"/>
-              <a:t> </a:t>
-            </a:r>
-            <a:r>
-              <a:rPr lang="ru-RU" dirty="0"/>
-              <a:t>и </a:t>
-            </a:r>
-            <a:r>
-              <a:rPr lang="en-US" dirty="0" err="1"/>
-              <a:t>sessionStorage</a:t>
-            </a:r>
-            <a:endParaRPr lang="ru-RU" dirty="0"/>
-          </a:p>
-        </p:txBody>
-      </p:sp>
-      <p:sp>
-        <p:nvSpPr>
-          <p:cNvPr id="3" name="Объект 2">
-            <a:extLst>
-              <a:ext uri="{FF2B5EF4-FFF2-40B4-BE49-F238E27FC236}">
-                <a16:creationId xmlns:a16="http://schemas.microsoft.com/office/drawing/2014/main" id="{88582A90-6D27-BD81-218B-32F632CE3066}"/>
-              </a:ext>
-            </a:extLst>
-          </p:cNvPr>
-          <p:cNvSpPr>
-            <a:spLocks noGrp="1"/>
-          </p:cNvSpPr>
-          <p:nvPr>
-            <p:ph idx="1"/>
-          </p:nvPr>
-        </p:nvSpPr>
-        <p:spPr/>
-        <p:txBody>
-          <a:bodyPr>
-            <a:normAutofit fontScale="85000" lnSpcReduction="20000"/>
-          </a:bodyPr>
-          <a:lstStyle/>
-          <a:p>
-            <a:pPr marL="0" indent="0">
-              <a:buNone/>
-            </a:pPr>
-            <a:r>
-              <a:rPr lang="ru-RU" dirty="0"/>
-              <a:t>позволяют хранить пары ключ/значение в браузере.</a:t>
-            </a:r>
-          </a:p>
-          <a:p>
-            <a:pPr marL="0" indent="0">
-              <a:buNone/>
-            </a:pPr>
-            <a:r>
-              <a:rPr lang="ru-RU" dirty="0"/>
-              <a:t>Данные, которые в них записаны, сохраняются после обновления страницы (в случае </a:t>
+              <a:t>Данные, которые в них записаны, сохраняются после обновления страницы (</a:t>
             </a:r>
             <a:r>
               <a:rPr lang="ru-RU" dirty="0" err="1"/>
@@ -4982,7 +5445,7 @@
             </a:r>
             <a:r>
               <a:rPr lang="ru-RU" dirty="0"/>
-              <a:t>) и даже после перезапуска браузера (при использовании </a:t>
+              <a:t>) и после перезапуска браузера (</a:t>
             </a:r>
             <a:r>
               <a:rPr lang="ru-RU" dirty="0" err="1"/>
@@ -5042,7 +5505,7 @@
             </a:r>
             <a:r>
               <a:rPr lang="ru-RU" dirty="0"/>
-              <a:t>) – сохранить пару ключ/значение.</a:t>
+              <a:t>)</a:t>
             </a:r>
           </a:p>
           <a:p>
@@ -5061,7 +5524,18 @@
             </a:r>
             <a:r>
               <a:rPr lang="ru-RU" dirty="0"/>
-              <a:t>) – получить данные по ключу </a:t>
+              <a:t>) </a:t>
+            </a:r>
+          </a:p>
+          <a:p>
+            <a:pPr lvl="0"/>
+            <a:r>
+              <a:rPr lang="ru-RU" dirty="0" err="1"/>
+              <a:t>removeItem</a:t>
+            </a:r>
+            <a:r>
+              <a:rPr lang="ru-RU" dirty="0"/>
+              <a:t>(</a:t>
             </a:r>
             <a:r>
               <a:rPr lang="ru-RU" dirty="0" err="1"/>
@@ -5069,14 +5543,25 @@
             </a:r>
             <a:r>
               <a:rPr lang="ru-RU" dirty="0"/>
-              <a:t>.</a:t>
+              <a:t>) </a:t>
             </a:r>
           </a:p>
           <a:p>
             <a:pPr lvl="0"/>
             <a:r>
               <a:rPr lang="ru-RU" dirty="0" err="1"/>
-              <a:t>removeItem</a:t>
+              <a:t>clear</a:t>
+            </a:r>
+            <a:r>
+              <a:rPr lang="ru-RU" dirty="0"/>
+              <a:t>() </a:t>
+            </a:r>
+          </a:p>
+          <a:p>
+            <a:pPr lvl="0"/>
+            <a:r>
+              <a:rPr lang="ru-RU" dirty="0" err="1"/>
+              <a:t>key</a:t>
             </a:r>
             <a:r>
               <a:rPr lang="ru-RU" dirty="0"/>
@@ -5084,49 +5569,11 @@
             </a:r>
             <a:r>
               <a:rPr lang="ru-RU" dirty="0" err="1"/>
-              <a:t>key</a:t>
+              <a:t>index</a:t>
             </a:r>
             <a:r>
               <a:rPr lang="ru-RU" dirty="0"/>
-              <a:t>) – удалить данные с ключом </a:t>
-            </a:r>
-            <a:r>
-              <a:rPr lang="ru-RU" dirty="0" err="1"/>
-              <a:t>key</a:t>
-            </a:r>
-            <a:r>
-              <a:rPr lang="ru-RU" dirty="0"/>
-              <a:t>.</a:t>
-            </a:r>
-          </a:p>
-          <a:p>
-            <a:pPr lvl="0"/>
-            <a:r>
-              <a:rPr lang="ru-RU" dirty="0" err="1"/>
-              <a:t>clear</a:t>
-            </a:r>
-            <a:r>
-              <a:rPr lang="ru-RU" dirty="0"/>
-              <a:t>() – удалить все данные.</a:t>
-            </a:r>
-          </a:p>
-          <a:p>
-            <a:pPr lvl="0"/>
-            <a:r>
-              <a:rPr lang="ru-RU" dirty="0" err="1"/>
-              <a:t>key</a:t>
-            </a:r>
-            <a:r>
-              <a:rPr lang="ru-RU" dirty="0"/>
-              <a:t>(</a:t>
-            </a:r>
-            <a:r>
-              <a:rPr lang="ru-RU" dirty="0" err="1"/>
-              <a:t>index</a:t>
-            </a:r>
-            <a:r>
-              <a:rPr lang="ru-RU" dirty="0"/>
-              <a:t>) – получить ключ на заданной позиции.</a:t>
+              <a:t>)</a:t>
             </a:r>
           </a:p>
           <a:p>
@@ -5135,16 +5582,48 @@
               <a:rPr lang="ru-RU" dirty="0" err="1"/>
               <a:t>length</a:t>
             </a:r>
-            <a:r>
-              <a:rPr lang="ru-RU" dirty="0"/>
-              <a:t> – количество элементов в хранилище.</a:t>
-            </a:r>
-          </a:p>
-          <a:p>
             <a:endParaRPr lang="ru-RU" dirty="0"/>
           </a:p>
           <a:p>
             <a:endParaRPr lang="ru-RU" dirty="0"/>
+          </a:p>
+        </p:txBody>
+      </p:sp>
+      <p:sp>
+        <p:nvSpPr>
+          <p:cNvPr id="5" name="TextBox 4">
+            <a:extLst>
+              <a:ext uri="{FF2B5EF4-FFF2-40B4-BE49-F238E27FC236}">
+                <a16:creationId xmlns:a16="http://schemas.microsoft.com/office/drawing/2014/main" id="{A9154AA6-85C3-485E-9FF2-D81D078FE786}"/>
+              </a:ext>
+            </a:extLst>
+          </p:cNvPr>
+          <p:cNvSpPr txBox="1"/>
+          <p:nvPr/>
+        </p:nvSpPr>
+        <p:spPr>
+          <a:xfrm>
+            <a:off x="838200" y="1296491"/>
+            <a:ext cx="9037320" cy="492443"/>
+          </a:xfrm>
+          <a:prstGeom prst="rect">
+            <a:avLst/>
+          </a:prstGeom>
+          <a:noFill/>
+        </p:spPr>
+        <p:txBody>
+          <a:bodyPr wrap="square">
+            <a:spAutoFit/>
+          </a:bodyPr>
+          <a:lstStyle/>
+          <a:p>
+            <a:pPr marL="0" indent="0">
+              <a:buNone/>
+            </a:pPr>
+            <a:r>
+              <a:rPr lang="ru-RU" sz="2600" dirty="0"/>
+              <a:t>позволяют хранить пары ключ/значение в браузере.</a:t>
+            </a:r>
           </a:p>
         </p:txBody>
       </p:sp>
@@ -5200,46 +5679,91 @@
           <a:lstStyle/>
           <a:p>
             <a:r>
+              <a:rPr lang="ru-RU" b="1" dirty="0">
+                <a:ln w="22225">
+                  <a:solidFill>
+                    <a:srgbClr val="7030A0"/>
+                  </a:solidFill>
+                  <a:prstDash val="solid"/>
+                </a:ln>
+                <a:solidFill>
+                  <a:srgbClr val="2FCEF9"/>
+                </a:solidFill>
+                <a:latin typeface="Segoe UI" panose="020B0502040204020203" pitchFamily="34" charset="0"/>
+                <a:cs typeface="Segoe UI" panose="020B0502040204020203" pitchFamily="34" charset="0"/>
+              </a:rPr>
+              <a:t>Сравнение с </a:t>
+            </a:r>
+            <a:r>
+              <a:rPr lang="en-US" b="1" dirty="0">
+                <a:ln w="22225">
+                  <a:solidFill>
+                    <a:srgbClr val="7030A0"/>
+                  </a:solidFill>
+                  <a:prstDash val="solid"/>
+                </a:ln>
+                <a:solidFill>
+                  <a:srgbClr val="2FCEF9"/>
+                </a:solidFill>
+                <a:latin typeface="Segoe UI" panose="020B0502040204020203" pitchFamily="34" charset="0"/>
+                <a:cs typeface="Segoe UI" panose="020B0502040204020203" pitchFamily="34" charset="0"/>
+              </a:rPr>
+              <a:t>cookies</a:t>
+            </a:r>
+            <a:endParaRPr lang="ru-RU" b="1" dirty="0">
+              <a:ln w="22225">
+                <a:solidFill>
+                  <a:srgbClr val="7030A0"/>
+                </a:solidFill>
+                <a:prstDash val="solid"/>
+              </a:ln>
+              <a:solidFill>
+                <a:srgbClr val="2FCEF9"/>
+              </a:solidFill>
+              <a:latin typeface="Segoe UI" panose="020B0502040204020203" pitchFamily="34" charset="0"/>
+              <a:cs typeface="Segoe UI" panose="020B0502040204020203" pitchFamily="34" charset="0"/>
+            </a:endParaRPr>
+          </a:p>
+        </p:txBody>
+      </p:sp>
+      <p:sp>
+        <p:nvSpPr>
+          <p:cNvPr id="3" name="Объект 2">
+            <a:extLst>
+              <a:ext uri="{FF2B5EF4-FFF2-40B4-BE49-F238E27FC236}">
+                <a16:creationId xmlns:a16="http://schemas.microsoft.com/office/drawing/2014/main" id="{B5ABD171-71D4-78D2-0F32-20D6D0144B80}"/>
+              </a:ext>
+            </a:extLst>
+          </p:cNvPr>
+          <p:cNvSpPr>
+            <a:spLocks noGrp="1"/>
+          </p:cNvSpPr>
+          <p:nvPr>
+            <p:ph idx="1"/>
+          </p:nvPr>
+        </p:nvSpPr>
+        <p:spPr/>
+        <p:txBody>
+          <a:bodyPr>
+            <a:normAutofit/>
+          </a:bodyPr>
+          <a:lstStyle/>
+          <a:p>
+            <a:pPr marL="0" lvl="0" indent="0">
+              <a:buNone/>
+            </a:pPr>
+            <a:r>
               <a:rPr lang="ru-RU" dirty="0"/>
-              <a:t>Сравнение с </a:t>
-            </a:r>
-            <a:r>
-              <a:rPr lang="en-US" dirty="0"/>
-              <a:t>cookies</a:t>
-            </a:r>
-            <a:endParaRPr lang="ru-RU" dirty="0"/>
-          </a:p>
-        </p:txBody>
-      </p:sp>
-      <p:sp>
-        <p:nvSpPr>
-          <p:cNvPr id="3" name="Объект 2">
-            <a:extLst>
-              <a:ext uri="{FF2B5EF4-FFF2-40B4-BE49-F238E27FC236}">
-                <a16:creationId xmlns:a16="http://schemas.microsoft.com/office/drawing/2014/main" id="{B5ABD171-71D4-78D2-0F32-20D6D0144B80}"/>
-              </a:ext>
-            </a:extLst>
-          </p:cNvPr>
-          <p:cNvSpPr>
-            <a:spLocks noGrp="1"/>
-          </p:cNvSpPr>
-          <p:nvPr>
-            <p:ph idx="1"/>
-          </p:nvPr>
-        </p:nvSpPr>
-        <p:spPr/>
-        <p:txBody>
-          <a:bodyPr>
-            <a:normAutofit fontScale="92500"/>
-          </a:bodyPr>
-          <a:lstStyle/>
+              <a:t>В отличие от куки, объекты веб-хранилища не отправляются на сервер при каждом запросе. Именно поэтому мы можем хранить гораздо больше данных. </a:t>
+            </a:r>
+          </a:p>
           <a:p>
             <a:pPr marL="0" lvl="0" indent="0">
               <a:buNone/>
             </a:pPr>
             <a:r>
               <a:rPr lang="ru-RU" dirty="0"/>
-              <a:t>В отличие от куки, объекты веб-хранилища не отправляются на сервер при каждом запросе. Именно поэтому мы можем хранить гораздо больше данных. Большинство современных браузеров могут выделить как минимум 5 мегабайтов данных (или больше), и этот размер можно поменять в настройках.</a:t>
+              <a:t>Ещё одно отличие – сервер не может манипулировать объектами хранилища через HTTP-заголовки. Всё делается при помощи JavaScript.</a:t>
             </a:r>
           </a:p>
           <a:p>
@@ -5248,16 +5772,7 @@
             </a:pPr>
             <a:r>
               <a:rPr lang="ru-RU" dirty="0"/>
-              <a:t>Ещё одно отличие от куки – сервер не может манипулировать объектами хранилища через HTTP-заголовки. Всё делается при помощи JavaScript.</a:t>
-            </a:r>
-          </a:p>
-          <a:p>
-            <a:pPr marL="0" lvl="0" indent="0">
-              <a:buNone/>
-            </a:pPr>
-            <a:r>
-              <a:rPr lang="ru-RU" dirty="0"/>
-              <a:t>Хранилище привязано к источнику (домен/протокол/порт). Это значит, что разные протоколы или поддомены определяют разные объекты хранилища, и они не могут получить доступ к данным друг друга.</a:t>
+              <a:t>Хранилище привязано к источнику (домен/протокол). Это значит, что разные протоколы или поддомены определяют разные объекты хранилища, и они не могут получить доступ к данным друг друга.</a:t>
             </a:r>
           </a:p>
         </p:txBody>
@@ -5314,10 +5829,34 @@
           <a:lstStyle/>
           <a:p>
             <a:r>
-              <a:rPr lang="en-US" dirty="0" err="1"/>
+              <a:rPr lang="en-US" b="1" dirty="0" err="1">
+                <a:ln w="22225">
+                  <a:solidFill>
+                    <a:srgbClr val="7030A0"/>
+                  </a:solidFill>
+                  <a:prstDash val="solid"/>
+                </a:ln>
+                <a:solidFill>
+                  <a:srgbClr val="2FCEF9"/>
+                </a:solidFill>
+                <a:latin typeface="Segoe UI" panose="020B0502040204020203" pitchFamily="34" charset="0"/>
+                <a:cs typeface="Segoe UI" panose="020B0502040204020203" pitchFamily="34" charset="0"/>
+              </a:rPr>
               <a:t>localStorage</a:t>
             </a:r>
-            <a:endParaRPr lang="ru-RU" dirty="0"/>
+            <a:endParaRPr lang="ru-RU" b="1" dirty="0">
+              <a:ln w="22225">
+                <a:solidFill>
+                  <a:srgbClr val="7030A0"/>
+                </a:solidFill>
+                <a:prstDash val="solid"/>
+              </a:ln>
+              <a:solidFill>
+                <a:srgbClr val="2FCEF9"/>
+              </a:solidFill>
+              <a:latin typeface="Segoe UI" panose="020B0502040204020203" pitchFamily="34" charset="0"/>
+              <a:cs typeface="Segoe UI" panose="020B0502040204020203" pitchFamily="34" charset="0"/>
+            </a:endParaRPr>
           </a:p>
         </p:txBody>
       </p:sp>
@@ -5337,10 +5876,15 @@
             <p:ph idx="1"/>
           </p:nvPr>
         </p:nvSpPr>
-        <p:spPr/>
+        <p:spPr>
+          <a:xfrm>
+            <a:off x="838200" y="1429385"/>
+            <a:ext cx="10515600" cy="4351338"/>
+          </a:xfrm>
+        </p:spPr>
         <p:txBody>
           <a:bodyPr>
-            <a:normAutofit fontScale="92500" lnSpcReduction="20000"/>
+            <a:noAutofit/>
           </a:bodyPr>
           <a:lstStyle/>
           <a:p>
@@ -5348,23 +5892,23 @@
               <a:buNone/>
             </a:pPr>
             <a:r>
-              <a:rPr lang="ru-RU" dirty="0"/>
+              <a:rPr lang="ru-RU" sz="2200" dirty="0"/>
               <a:t>создали в качестве альтернативы </a:t>
             </a:r>
             <a:r>
-              <a:rPr lang="en-US" dirty="0"/>
+              <a:rPr lang="en-US" sz="2200" dirty="0"/>
               <a:t>c</a:t>
             </a:r>
             <a:r>
-              <a:rPr lang="ru-RU" dirty="0" err="1"/>
+              <a:rPr lang="ru-RU" sz="2200" dirty="0" err="1"/>
               <a:t>ookie</a:t>
             </a:r>
             <a:r>
-              <a:rPr lang="en-US" dirty="0"/>
+              <a:rPr lang="en-US" sz="2200" dirty="0"/>
               <a:t>s</a:t>
             </a:r>
             <a:r>
-              <a:rPr lang="ru-RU" dirty="0"/>
+              <a:rPr lang="ru-RU" sz="2200" dirty="0"/>
               <a:t>, чтобы обойти ограничения последних. А именно — небольшой объем хранилища, необходимость постоянно передавать данные с сервера в браузер и обратно.</a:t>
             </a:r>
           </a:p>
@@ -5372,24 +5916,30 @@
             <a:pPr marL="0" indent="0">
               <a:buNone/>
             </a:pPr>
-            <a:r>
-              <a:rPr lang="ru-RU" dirty="0"/>
+            <a:endParaRPr lang="ru-RU" sz="2200" dirty="0"/>
+          </a:p>
+          <a:p>
+            <a:pPr marL="0" indent="0">
+              <a:buNone/>
+            </a:pPr>
+            <a:r>
+              <a:rPr lang="ru-RU" sz="2200" dirty="0"/>
               <a:t>Например, если запустить этот код: </a:t>
             </a:r>
             <a:r>
-              <a:rPr lang="ru-RU" dirty="0" err="1"/>
+              <a:rPr lang="ru-RU" sz="2200" dirty="0" err="1"/>
               <a:t>localStorage.setItem</a:t>
             </a:r>
             <a:r>
-              <a:rPr lang="ru-RU" dirty="0"/>
+              <a:rPr lang="ru-RU" sz="2200" dirty="0"/>
               <a:t>('</a:t>
             </a:r>
             <a:r>
-              <a:rPr lang="ru-RU" dirty="0" err="1"/>
+              <a:rPr lang="ru-RU" sz="2200" dirty="0" err="1"/>
               <a:t>test</a:t>
             </a:r>
             <a:r>
-              <a:rPr lang="ru-RU" dirty="0"/>
+              <a:rPr lang="ru-RU" sz="2200" dirty="0"/>
               <a:t>', 1);</a:t>
             </a:r>
           </a:p>
@@ -5398,31 +5948,31 @@
               <a:buNone/>
             </a:pPr>
             <a:r>
-              <a:rPr lang="ru-RU" dirty="0"/>
+              <a:rPr lang="ru-RU" sz="2200" dirty="0"/>
               <a:t>И закрыть/открыть браузер или открыть ту же страницу в другом окне, то можно получить данные следующим образом: </a:t>
             </a:r>
             <a:r>
-              <a:rPr lang="ru-RU" dirty="0" err="1"/>
+              <a:rPr lang="ru-RU" sz="2200" dirty="0" err="1"/>
               <a:t>alert</a:t>
             </a:r>
             <a:r>
-              <a:rPr lang="ru-RU" dirty="0"/>
+              <a:rPr lang="ru-RU" sz="2200" dirty="0"/>
               <a:t>( </a:t>
             </a:r>
             <a:r>
-              <a:rPr lang="ru-RU" dirty="0" err="1"/>
+              <a:rPr lang="ru-RU" sz="2200" dirty="0" err="1"/>
               <a:t>localStorage.getItem</a:t>
             </a:r>
             <a:r>
-              <a:rPr lang="ru-RU" dirty="0"/>
+              <a:rPr lang="ru-RU" sz="2200" dirty="0"/>
               <a:t>('</a:t>
             </a:r>
             <a:r>
-              <a:rPr lang="ru-RU" dirty="0" err="1"/>
+              <a:rPr lang="ru-RU" sz="2200" dirty="0" err="1"/>
               <a:t>test</a:t>
             </a:r>
             <a:r>
-              <a:rPr lang="ru-RU" dirty="0"/>
+              <a:rPr lang="ru-RU" sz="2200" dirty="0"/>
               <a:t>') ); // 1</a:t>
             </a:r>
           </a:p>
@@ -5430,8 +5980,14 @@
             <a:pPr marL="0" indent="0">
               <a:buNone/>
             </a:pPr>
-            <a:r>
-              <a:rPr lang="ru-RU" dirty="0"/>
+            <a:endParaRPr lang="ru-RU" sz="2200" dirty="0"/>
+          </a:p>
+          <a:p>
+            <a:pPr marL="0" indent="0">
+              <a:buNone/>
+            </a:pPr>
+            <a:r>
+              <a:rPr lang="ru-RU" sz="2200" dirty="0"/>
               <a:t>В локальном хранилище, в отличие от сеансового, данные сохраняются после закрытия и повторного открытия страницы.</a:t>
             </a:r>
           </a:p>
@@ -5440,12 +5996,9 @@
               <a:buNone/>
             </a:pPr>
             <a:r>
-              <a:rPr lang="ru-RU" dirty="0"/>
+              <a:rPr lang="ru-RU" sz="2200" dirty="0"/>
               <a:t>Поскольку данные не исчезают даже после выключения компьютера, сайты на длительный срок сохраняют нужную им информацию — в первую очередь это предпочтения пользователя и его настройки.</a:t>
             </a:r>
-          </a:p>
-          <a:p>
-            <a:endParaRPr lang="ru-RU" dirty="0"/>
           </a:p>
         </p:txBody>
       </p:sp>
@@ -5501,14 +6054,50 @@
           <a:lstStyle/>
           <a:p>
             <a:r>
-              <a:rPr lang="ru-RU" dirty="0"/>
+              <a:rPr lang="ru-RU" b="1" dirty="0">
+                <a:ln w="22225">
+                  <a:solidFill>
+                    <a:srgbClr val="7030A0"/>
+                  </a:solidFill>
+                  <a:prstDash val="solid"/>
+                </a:ln>
+                <a:solidFill>
+                  <a:srgbClr val="2FCEF9"/>
+                </a:solidFill>
+                <a:latin typeface="Segoe UI" panose="020B0502040204020203" pitchFamily="34" charset="0"/>
+                <a:cs typeface="Segoe UI" panose="020B0502040204020203" pitchFamily="34" charset="0"/>
+              </a:rPr>
               <a:t>Пример кода</a:t>
             </a:r>
             <a:r>
-              <a:rPr lang="en-US" dirty="0"/>
+              <a:rPr lang="en-US" b="1" dirty="0">
+                <a:ln w="22225">
+                  <a:solidFill>
+                    <a:srgbClr val="7030A0"/>
+                  </a:solidFill>
+                  <a:prstDash val="solid"/>
+                </a:ln>
+                <a:solidFill>
+                  <a:srgbClr val="2FCEF9"/>
+                </a:solidFill>
+                <a:latin typeface="Segoe UI" panose="020B0502040204020203" pitchFamily="34" charset="0"/>
+                <a:cs typeface="Segoe UI" panose="020B0502040204020203" pitchFamily="34" charset="0"/>
+              </a:rPr>
               <a:t>:</a:t>
             </a:r>
-            <a:endParaRPr lang="ru-RU" dirty="0"/>
+            <a:endParaRPr lang="ru-RU" b="1" dirty="0">
+              <a:ln w="22225">
+                <a:solidFill>
+                  <a:srgbClr val="7030A0"/>
+                </a:solidFill>
+                <a:prstDash val="solid"/>
+              </a:ln>
+              <a:solidFill>
+                <a:srgbClr val="2FCEF9"/>
+              </a:solidFill>
+              <a:latin typeface="Segoe UI" panose="020B0502040204020203" pitchFamily="34" charset="0"/>
+              <a:cs typeface="Segoe UI" panose="020B0502040204020203" pitchFamily="34" charset="0"/>
+            </a:endParaRPr>
           </a:p>
         </p:txBody>
       </p:sp>
@@ -5525,212 +6114,571 @@
             <a:spLocks noGrp="1"/>
           </p:cNvSpPr>
           <p:nvPr>
-            <p:ph idx="1"/>
+            <p:ph sz="half" idx="1"/>
           </p:nvPr>
         </p:nvSpPr>
         <p:spPr>
-          <a:xfrm>
-            <a:off x="838200" y="1536867"/>
-            <a:ext cx="10515600" cy="4351338"/>
-          </a:xfrm>
+          <a:solidFill>
+            <a:schemeClr val="accent1">
+              <a:lumMod val="20000"/>
+              <a:lumOff val="80000"/>
+            </a:schemeClr>
+          </a:solidFill>
         </p:spPr>
         <p:txBody>
           <a:bodyPr>
-            <a:normAutofit fontScale="25000" lnSpcReduction="20000"/>
+            <a:normAutofit fontScale="32500" lnSpcReduction="20000"/>
           </a:bodyPr>
           <a:lstStyle/>
           <a:p>
             <a:pPr marL="0" indent="0">
-              <a:buNone/>
-            </a:pPr>
-            <a:r>
-              <a:rPr lang="en-US" sz="7400" dirty="0"/>
-              <a:t>// Storing data in local storage</a:t>
-            </a:r>
-            <a:endParaRPr lang="ru-RU" sz="7400" dirty="0"/>
-          </a:p>
-          <a:p>
-            <a:pPr marL="0" indent="0">
-              <a:buNone/>
-            </a:pPr>
-            <a:r>
-              <a:rPr lang="en-US" sz="7400" dirty="0" err="1"/>
+              <a:lnSpc>
+                <a:spcPct val="120000"/>
+              </a:lnSpc>
+              <a:buNone/>
+            </a:pPr>
+            <a:r>
+              <a:rPr lang="en-US" sz="7400" dirty="0">
+                <a:solidFill>
+                  <a:schemeClr val="accent1">
+                    <a:lumMod val="50000"/>
+                  </a:schemeClr>
+                </a:solidFill>
+              </a:rPr>
+              <a:t>// </a:t>
+            </a:r>
+            <a:r>
+              <a:rPr lang="ru-RU" sz="7400" dirty="0">
+                <a:solidFill>
+                  <a:schemeClr val="accent1">
+                    <a:lumMod val="50000"/>
+                  </a:schemeClr>
+                </a:solidFill>
+              </a:rPr>
+              <a:t>Сохраняем данные в </a:t>
+            </a:r>
+            <a:r>
+              <a:rPr lang="en-US" sz="7400" dirty="0" err="1">
+                <a:solidFill>
+                  <a:schemeClr val="accent1">
+                    <a:lumMod val="50000"/>
+                  </a:schemeClr>
+                </a:solidFill>
+              </a:rPr>
+              <a:t>localStorage</a:t>
+            </a:r>
+            <a:endParaRPr lang="ru-RU" sz="7400" dirty="0">
+              <a:solidFill>
+                <a:schemeClr val="accent1">
+                  <a:lumMod val="50000"/>
+                </a:schemeClr>
+              </a:solidFill>
+            </a:endParaRPr>
+          </a:p>
+          <a:p>
+            <a:pPr marL="0" indent="0">
+              <a:lnSpc>
+                <a:spcPct val="120000"/>
+              </a:lnSpc>
+              <a:buNone/>
+            </a:pPr>
+            <a:r>
+              <a:rPr lang="en-US" sz="7400" dirty="0" err="1">
+                <a:solidFill>
+                  <a:schemeClr val="accent1">
+                    <a:lumMod val="50000"/>
+                  </a:schemeClr>
+                </a:solidFill>
+              </a:rPr>
               <a:t>localStorage.setItem</a:t>
             </a:r>
             <a:r>
-              <a:rPr lang="en-US" sz="7400" dirty="0"/>
+              <a:rPr lang="en-US" sz="7400" dirty="0">
+                <a:solidFill>
+                  <a:schemeClr val="accent1">
+                    <a:lumMod val="50000"/>
+                  </a:schemeClr>
+                </a:solidFill>
+              </a:rPr>
               <a:t>("name", "Mathew");</a:t>
             </a:r>
-            <a:endParaRPr lang="ru-RU" sz="7400" dirty="0"/>
-          </a:p>
-          <a:p>
-            <a:pPr marL="0" indent="0">
-              <a:buNone/>
-            </a:pPr>
-            <a:r>
-              <a:rPr lang="en-US" sz="7400" dirty="0" err="1"/>
+            <a:endParaRPr lang="ru-RU" sz="7400" dirty="0">
+              <a:solidFill>
+                <a:schemeClr val="accent1">
+                  <a:lumMod val="50000"/>
+                </a:schemeClr>
+              </a:solidFill>
+            </a:endParaRPr>
+          </a:p>
+          <a:p>
+            <a:pPr marL="0" indent="0">
+              <a:lnSpc>
+                <a:spcPct val="120000"/>
+              </a:lnSpc>
+              <a:buNone/>
+            </a:pPr>
+            <a:r>
+              <a:rPr lang="en-US" sz="7400" dirty="0" err="1">
+                <a:solidFill>
+                  <a:schemeClr val="accent1">
+                    <a:lumMod val="50000"/>
+                  </a:schemeClr>
+                </a:solidFill>
+              </a:rPr>
               <a:t>localStorage.setItem</a:t>
             </a:r>
             <a:r>
-              <a:rPr lang="en-US" sz="7400" dirty="0"/>
+              <a:rPr lang="en-US" sz="7400" dirty="0">
+                <a:solidFill>
+                  <a:schemeClr val="accent1">
+                    <a:lumMod val="50000"/>
+                  </a:schemeClr>
+                </a:solidFill>
+              </a:rPr>
               <a:t>("age", "33");</a:t>
             </a:r>
-            <a:endParaRPr lang="ru-RU" sz="7400" dirty="0"/>
-          </a:p>
-          <a:p>
-            <a:pPr marL="0" indent="0">
-              <a:buNone/>
-            </a:pPr>
-            <a:r>
-              <a:rPr lang="en-US" sz="7400" dirty="0"/>
+            <a:endParaRPr lang="ru-RU" sz="7400" dirty="0">
+              <a:solidFill>
+                <a:schemeClr val="accent1">
+                  <a:lumMod val="50000"/>
+                </a:schemeClr>
+              </a:solidFill>
+            </a:endParaRPr>
+          </a:p>
+          <a:p>
+            <a:pPr marL="0" indent="0">
+              <a:lnSpc>
+                <a:spcPct val="120000"/>
+              </a:lnSpc>
+              <a:buNone/>
+            </a:pPr>
+            <a:r>
+              <a:rPr lang="en-US" sz="7400" dirty="0">
+                <a:solidFill>
+                  <a:schemeClr val="accent1">
+                    <a:lumMod val="50000"/>
+                  </a:schemeClr>
+                </a:solidFill>
+              </a:rPr>
               <a:t> </a:t>
             </a:r>
-            <a:endParaRPr lang="ru-RU" sz="7400" dirty="0"/>
-          </a:p>
-          <a:p>
-            <a:pPr marL="0" indent="0">
-              <a:buNone/>
-            </a:pPr>
-            <a:r>
-              <a:rPr lang="en-US" sz="7400" dirty="0"/>
-              <a:t>// Retrieving data from local storage</a:t>
-            </a:r>
-            <a:endParaRPr lang="ru-RU" sz="7400" dirty="0"/>
-          </a:p>
-          <a:p>
-            <a:pPr marL="0" indent="0">
-              <a:buNone/>
-            </a:pPr>
-            <a:r>
-              <a:rPr lang="en-US" sz="7400" dirty="0"/>
+            <a:endParaRPr lang="ru-RU" sz="7400" dirty="0">
+              <a:solidFill>
+                <a:schemeClr val="accent1">
+                  <a:lumMod val="50000"/>
+                </a:schemeClr>
+              </a:solidFill>
+            </a:endParaRPr>
+          </a:p>
+          <a:p>
+            <a:pPr marL="0" indent="0">
+              <a:lnSpc>
+                <a:spcPct val="120000"/>
+              </a:lnSpc>
+              <a:buNone/>
+            </a:pPr>
+            <a:r>
+              <a:rPr lang="en-US" sz="7400" dirty="0">
+                <a:solidFill>
+                  <a:schemeClr val="accent1">
+                    <a:lumMod val="50000"/>
+                  </a:schemeClr>
+                </a:solidFill>
+              </a:rPr>
+              <a:t>// </a:t>
+            </a:r>
+            <a:r>
+              <a:rPr lang="ru-RU" sz="7400" dirty="0">
+                <a:solidFill>
+                  <a:schemeClr val="accent1">
+                    <a:lumMod val="50000"/>
+                  </a:schemeClr>
+                </a:solidFill>
+              </a:rPr>
+              <a:t>Извлекаем данные из </a:t>
+            </a:r>
+            <a:r>
+              <a:rPr lang="en-US" sz="7400" dirty="0" err="1">
+                <a:solidFill>
+                  <a:schemeClr val="accent1">
+                    <a:lumMod val="50000"/>
+                  </a:schemeClr>
+                </a:solidFill>
+              </a:rPr>
+              <a:t>localStorage</a:t>
+            </a:r>
+            <a:endParaRPr lang="ru-RU" sz="7400" dirty="0">
+              <a:solidFill>
+                <a:schemeClr val="accent1">
+                  <a:lumMod val="50000"/>
+                </a:schemeClr>
+              </a:solidFill>
+            </a:endParaRPr>
+          </a:p>
+          <a:p>
+            <a:pPr marL="0" indent="0">
+              <a:lnSpc>
+                <a:spcPct val="120000"/>
+              </a:lnSpc>
+              <a:buNone/>
+            </a:pPr>
+            <a:r>
+              <a:rPr lang="en-US" sz="7400" dirty="0">
+                <a:solidFill>
+                  <a:schemeClr val="accent1">
+                    <a:lumMod val="50000"/>
+                  </a:schemeClr>
+                </a:solidFill>
+              </a:rPr>
               <a:t>const name = </a:t>
             </a:r>
             <a:r>
-              <a:rPr lang="en-US" sz="7400" dirty="0" err="1"/>
+              <a:rPr lang="en-US" sz="7400" dirty="0" err="1">
+                <a:solidFill>
+                  <a:schemeClr val="accent1">
+                    <a:lumMod val="50000"/>
+                  </a:schemeClr>
+                </a:solidFill>
+              </a:rPr>
               <a:t>localStorage.getItem</a:t>
             </a:r>
             <a:r>
-              <a:rPr lang="en-US" sz="7400" dirty="0"/>
+              <a:rPr lang="en-US" sz="7400" dirty="0">
+                <a:solidFill>
+                  <a:schemeClr val="accent1">
+                    <a:lumMod val="50000"/>
+                  </a:schemeClr>
+                </a:solidFill>
+              </a:rPr>
               <a:t>("name");</a:t>
             </a:r>
-            <a:endParaRPr lang="ru-RU" sz="7400" dirty="0"/>
-          </a:p>
-          <a:p>
-            <a:pPr marL="0" indent="0">
-              <a:buNone/>
-            </a:pPr>
-            <a:r>
-              <a:rPr lang="en-US" sz="7400" dirty="0"/>
+            <a:endParaRPr lang="ru-RU" sz="7400" dirty="0">
+              <a:solidFill>
+                <a:schemeClr val="accent1">
+                  <a:lumMod val="50000"/>
+                </a:schemeClr>
+              </a:solidFill>
+            </a:endParaRPr>
+          </a:p>
+          <a:p>
+            <a:pPr marL="0" indent="0">
+              <a:lnSpc>
+                <a:spcPct val="120000"/>
+              </a:lnSpc>
+              <a:buNone/>
+            </a:pPr>
+            <a:r>
+              <a:rPr lang="en-US" sz="7400" dirty="0">
+                <a:solidFill>
+                  <a:schemeClr val="accent1">
+                    <a:lumMod val="50000"/>
+                  </a:schemeClr>
+                </a:solidFill>
+              </a:rPr>
               <a:t>const age = </a:t>
             </a:r>
             <a:r>
-              <a:rPr lang="en-US" sz="7400" dirty="0" err="1"/>
+              <a:rPr lang="en-US" sz="7400" dirty="0" err="1">
+                <a:solidFill>
+                  <a:schemeClr val="accent1">
+                    <a:lumMod val="50000"/>
+                  </a:schemeClr>
+                </a:solidFill>
+              </a:rPr>
               <a:t>localStorage.getItem</a:t>
             </a:r>
             <a:r>
-              <a:rPr lang="en-US" sz="7400" dirty="0"/>
+              <a:rPr lang="en-US" sz="7400" dirty="0">
+                <a:solidFill>
+                  <a:schemeClr val="accent1">
+                    <a:lumMod val="50000"/>
+                  </a:schemeClr>
+                </a:solidFill>
+              </a:rPr>
               <a:t>("age");</a:t>
             </a:r>
-            <a:endParaRPr lang="ru-RU" sz="7400" dirty="0"/>
-          </a:p>
-          <a:p>
-            <a:pPr marL="0" indent="0">
-              <a:buNone/>
-            </a:pPr>
-            <a:endParaRPr lang="ru-RU" sz="7400" dirty="0"/>
-          </a:p>
-          <a:p>
-            <a:pPr marL="0" indent="0">
-              <a:buNone/>
-            </a:pPr>
-            <a:r>
-              <a:rPr lang="en-US" sz="7400" dirty="0"/>
+            <a:endParaRPr lang="ru-RU" sz="7400" dirty="0">
+              <a:solidFill>
+                <a:schemeClr val="accent1">
+                  <a:lumMod val="50000"/>
+                </a:schemeClr>
+              </a:solidFill>
+            </a:endParaRPr>
+          </a:p>
+          <a:p>
+            <a:pPr marL="0" indent="0">
+              <a:lnSpc>
+                <a:spcPct val="120000"/>
+              </a:lnSpc>
+              <a:buNone/>
+            </a:pPr>
+            <a:endParaRPr lang="ru-RU" dirty="0">
+              <a:solidFill>
+                <a:schemeClr val="accent1">
+                  <a:lumMod val="50000"/>
+                </a:schemeClr>
+              </a:solidFill>
+            </a:endParaRPr>
+          </a:p>
+        </p:txBody>
+      </p:sp>
+      <p:sp>
+        <p:nvSpPr>
+          <p:cNvPr id="11" name="Объект 10">
+            <a:extLst>
+              <a:ext uri="{FF2B5EF4-FFF2-40B4-BE49-F238E27FC236}">
+                <a16:creationId xmlns:a16="http://schemas.microsoft.com/office/drawing/2014/main" id="{DA919891-105D-45E2-A07B-19EBD551468A}"/>
+              </a:ext>
+            </a:extLst>
+          </p:cNvPr>
+          <p:cNvSpPr>
+            <a:spLocks noGrp="1"/>
+          </p:cNvSpPr>
+          <p:nvPr>
+            <p:ph sz="half" idx="2"/>
+          </p:nvPr>
+        </p:nvSpPr>
+        <p:spPr>
+          <a:solidFill>
+            <a:schemeClr val="accent1">
+              <a:lumMod val="20000"/>
+              <a:lumOff val="80000"/>
+            </a:schemeClr>
+          </a:solidFill>
+        </p:spPr>
+        <p:txBody>
+          <a:bodyPr>
+            <a:noAutofit/>
+          </a:bodyPr>
+          <a:lstStyle/>
+          <a:p>
+            <a:pPr marL="0" indent="0">
+              <a:buNone/>
+            </a:pPr>
+            <a:r>
+              <a:rPr lang="en-US" sz="2400" dirty="0">
+                <a:solidFill>
+                  <a:schemeClr val="accent1">
+                    <a:lumMod val="50000"/>
+                  </a:schemeClr>
+                </a:solidFill>
+              </a:rPr>
               <a:t>console.log(name); // Output: Mathew</a:t>
             </a:r>
-            <a:endParaRPr lang="ru-RU" sz="7400" dirty="0"/>
-          </a:p>
-          <a:p>
-            <a:pPr marL="0" indent="0">
-              <a:buNone/>
-            </a:pPr>
-            <a:r>
-              <a:rPr lang="en-US" sz="7400" dirty="0"/>
+            <a:endParaRPr lang="ru-RU" sz="2400" dirty="0">
+              <a:solidFill>
+                <a:schemeClr val="accent1">
+                  <a:lumMod val="50000"/>
+                </a:schemeClr>
+              </a:solidFill>
+            </a:endParaRPr>
+          </a:p>
+          <a:p>
+            <a:pPr marL="0" indent="0">
+              <a:buNone/>
+            </a:pPr>
+            <a:r>
+              <a:rPr lang="en-US" sz="2400" dirty="0">
+                <a:solidFill>
+                  <a:schemeClr val="accent1">
+                    <a:lumMod val="50000"/>
+                  </a:schemeClr>
+                </a:solidFill>
+              </a:rPr>
               <a:t>console.log(age); // Output: 33</a:t>
             </a:r>
-            <a:endParaRPr lang="ru-RU" sz="7400" dirty="0"/>
-          </a:p>
-          <a:p>
-            <a:pPr marL="0" indent="0">
-              <a:buNone/>
-            </a:pPr>
-            <a:r>
-              <a:rPr lang="en-US" sz="7400" dirty="0"/>
+            <a:endParaRPr lang="ru-RU" sz="2400" dirty="0">
+              <a:solidFill>
+                <a:schemeClr val="accent1">
+                  <a:lumMod val="50000"/>
+                </a:schemeClr>
+              </a:solidFill>
+            </a:endParaRPr>
+          </a:p>
+          <a:p>
+            <a:pPr marL="0" indent="0">
+              <a:buNone/>
+            </a:pPr>
+            <a:r>
+              <a:rPr lang="en-US" sz="2400" dirty="0">
+                <a:solidFill>
+                  <a:schemeClr val="accent1">
+                    <a:lumMod val="50000"/>
+                  </a:schemeClr>
+                </a:solidFill>
+              </a:rPr>
               <a:t> </a:t>
             </a:r>
-            <a:endParaRPr lang="ru-RU" sz="7400" dirty="0"/>
-          </a:p>
-          <a:p>
-            <a:pPr marL="0" indent="0">
-              <a:buNone/>
-            </a:pPr>
-            <a:r>
-              <a:rPr lang="en-US" sz="7400" dirty="0"/>
-              <a:t>// Removing data from local storage</a:t>
-            </a:r>
-            <a:endParaRPr lang="ru-RU" sz="7400" dirty="0"/>
-          </a:p>
-          <a:p>
-            <a:pPr marL="0" indent="0">
-              <a:buNone/>
-            </a:pPr>
-            <a:r>
-              <a:rPr lang="en-US" sz="7400" dirty="0" err="1"/>
+            <a:endParaRPr lang="ru-RU" sz="2400" dirty="0">
+              <a:solidFill>
+                <a:schemeClr val="accent1">
+                  <a:lumMod val="50000"/>
+                </a:schemeClr>
+              </a:solidFill>
+            </a:endParaRPr>
+          </a:p>
+          <a:p>
+            <a:pPr marL="0" indent="0">
+              <a:buNone/>
+            </a:pPr>
+            <a:r>
+              <a:rPr lang="en-US" sz="2400" dirty="0">
+                <a:solidFill>
+                  <a:schemeClr val="accent1">
+                    <a:lumMod val="50000"/>
+                  </a:schemeClr>
+                </a:solidFill>
+              </a:rPr>
+              <a:t>// </a:t>
+            </a:r>
+            <a:r>
+              <a:rPr lang="ru-RU" sz="2400" dirty="0">
+                <a:solidFill>
+                  <a:schemeClr val="accent1">
+                    <a:lumMod val="50000"/>
+                  </a:schemeClr>
+                </a:solidFill>
+              </a:rPr>
+              <a:t>Удаляем данные из </a:t>
+            </a:r>
+            <a:r>
+              <a:rPr lang="en-US" sz="2400" dirty="0" err="1">
+                <a:solidFill>
+                  <a:schemeClr val="accent1">
+                    <a:lumMod val="50000"/>
+                  </a:schemeClr>
+                </a:solidFill>
+              </a:rPr>
+              <a:t>localStorage</a:t>
+            </a:r>
+            <a:endParaRPr lang="ru-RU" sz="2400" dirty="0">
+              <a:solidFill>
+                <a:schemeClr val="accent1">
+                  <a:lumMod val="50000"/>
+                </a:schemeClr>
+              </a:solidFill>
+            </a:endParaRPr>
+          </a:p>
+          <a:p>
+            <a:pPr marL="0" indent="0">
+              <a:buNone/>
+            </a:pPr>
+            <a:r>
+              <a:rPr lang="en-US" sz="2400" dirty="0" err="1">
+                <a:solidFill>
+                  <a:schemeClr val="accent1">
+                    <a:lumMod val="50000"/>
+                  </a:schemeClr>
+                </a:solidFill>
+              </a:rPr>
               <a:t>localStorage.removeItem</a:t>
             </a:r>
             <a:r>
-              <a:rPr lang="en-US" sz="7400" dirty="0"/>
+              <a:rPr lang="en-US" sz="2400" dirty="0">
+                <a:solidFill>
+                  <a:schemeClr val="accent1">
+                    <a:lumMod val="50000"/>
+                  </a:schemeClr>
+                </a:solidFill>
+              </a:rPr>
               <a:t>("age");</a:t>
             </a:r>
-            <a:endParaRPr lang="ru-RU" sz="7400" dirty="0"/>
-          </a:p>
-          <a:p>
-            <a:pPr marL="0" indent="0">
-              <a:buNone/>
-            </a:pPr>
-            <a:r>
-              <a:rPr lang="en-US" sz="7400" dirty="0"/>
+            <a:endParaRPr lang="ru-RU" sz="2400" dirty="0">
+              <a:solidFill>
+                <a:schemeClr val="accent1">
+                  <a:lumMod val="50000"/>
+                </a:schemeClr>
+              </a:solidFill>
+            </a:endParaRPr>
+          </a:p>
+          <a:p>
+            <a:pPr marL="0" indent="0">
+              <a:buNone/>
+            </a:pPr>
+            <a:r>
+              <a:rPr lang="en-US" sz="2400" dirty="0">
+                <a:solidFill>
+                  <a:schemeClr val="accent1">
+                    <a:lumMod val="50000"/>
+                  </a:schemeClr>
+                </a:solidFill>
+              </a:rPr>
               <a:t> </a:t>
             </a:r>
-            <a:endParaRPr lang="ru-RU" sz="7400" dirty="0"/>
-          </a:p>
-          <a:p>
-            <a:pPr marL="0" indent="0">
-              <a:buNone/>
-            </a:pPr>
-            <a:r>
-              <a:rPr lang="en-US" sz="7400" dirty="0"/>
-              <a:t>// Clearing all data from local storage</a:t>
-            </a:r>
-            <a:endParaRPr lang="ru-RU" sz="7400" dirty="0"/>
-          </a:p>
-          <a:p>
-            <a:pPr marL="0" indent="0">
-              <a:buNone/>
-            </a:pPr>
-            <a:r>
-              <a:rPr lang="ru-RU" sz="7400" dirty="0" err="1"/>
+            <a:endParaRPr lang="ru-RU" sz="2400" dirty="0">
+              <a:solidFill>
+                <a:schemeClr val="accent1">
+                  <a:lumMod val="50000"/>
+                </a:schemeClr>
+              </a:solidFill>
+            </a:endParaRPr>
+          </a:p>
+          <a:p>
+            <a:pPr marL="0" indent="0">
+              <a:buNone/>
+            </a:pPr>
+            <a:r>
+              <a:rPr lang="en-US" sz="2400" dirty="0">
+                <a:solidFill>
+                  <a:schemeClr val="accent1">
+                    <a:lumMod val="50000"/>
+                  </a:schemeClr>
+                </a:solidFill>
+              </a:rPr>
+              <a:t>// </a:t>
+            </a:r>
+            <a:r>
+              <a:rPr lang="ru-RU" sz="2400" dirty="0">
+                <a:solidFill>
+                  <a:schemeClr val="accent1">
+                    <a:lumMod val="50000"/>
+                  </a:schemeClr>
+                </a:solidFill>
+              </a:rPr>
+              <a:t>Удаляем ВСЕ данные из </a:t>
+            </a:r>
+            <a:r>
+              <a:rPr lang="en-US" sz="2400" dirty="0" err="1">
+                <a:solidFill>
+                  <a:schemeClr val="accent1">
+                    <a:lumMod val="50000"/>
+                  </a:schemeClr>
+                </a:solidFill>
+              </a:rPr>
+              <a:t>localStorage</a:t>
+            </a:r>
+            <a:endParaRPr lang="ru-RU" sz="2400" dirty="0">
+              <a:solidFill>
+                <a:schemeClr val="accent1">
+                  <a:lumMod val="50000"/>
+                </a:schemeClr>
+              </a:solidFill>
+            </a:endParaRPr>
+          </a:p>
+          <a:p>
+            <a:pPr marL="0" indent="0">
+              <a:buNone/>
+            </a:pPr>
+            <a:r>
+              <a:rPr lang="ru-RU" sz="2400" dirty="0" err="1">
+                <a:solidFill>
+                  <a:schemeClr val="accent1">
+                    <a:lumMod val="50000"/>
+                  </a:schemeClr>
+                </a:solidFill>
+              </a:rPr>
               <a:t>localStorage.clear</a:t>
             </a:r>
             <a:r>
-              <a:rPr lang="ru-RU" sz="7400" dirty="0"/>
+              <a:rPr lang="ru-RU" sz="2400" dirty="0">
+                <a:solidFill>
+                  <a:schemeClr val="accent1">
+                    <a:lumMod val="50000"/>
+                  </a:schemeClr>
+                </a:solidFill>
+              </a:rPr>
               <a:t>();</a:t>
             </a:r>
-          </a:p>
-          <a:p>
-            <a:pPr marL="0" indent="0">
-              <a:buNone/>
-            </a:pPr>
-            <a:endParaRPr lang="ru-RU" dirty="0"/>
           </a:p>
         </p:txBody>
       </p:sp>
@@ -5786,47 +6734,71 @@
           <a:lstStyle/>
           <a:p>
             <a:r>
+              <a:rPr lang="en-US" b="1" dirty="0" err="1">
+                <a:ln w="22225">
+                  <a:solidFill>
+                    <a:srgbClr val="7030A0"/>
+                  </a:solidFill>
+                  <a:prstDash val="solid"/>
+                </a:ln>
+                <a:solidFill>
+                  <a:srgbClr val="2FCEF9"/>
+                </a:solidFill>
+                <a:latin typeface="Segoe UI" panose="020B0502040204020203" pitchFamily="34" charset="0"/>
+                <a:cs typeface="Segoe UI" panose="020B0502040204020203" pitchFamily="34" charset="0"/>
+              </a:rPr>
+              <a:t>sessionStorage</a:t>
+            </a:r>
+            <a:endParaRPr lang="ru-RU" b="1" dirty="0">
+              <a:ln w="22225">
+                <a:solidFill>
+                  <a:srgbClr val="7030A0"/>
+                </a:solidFill>
+                <a:prstDash val="solid"/>
+              </a:ln>
+              <a:solidFill>
+                <a:srgbClr val="2FCEF9"/>
+              </a:solidFill>
+              <a:latin typeface="Segoe UI" panose="020B0502040204020203" pitchFamily="34" charset="0"/>
+              <a:cs typeface="Segoe UI" panose="020B0502040204020203" pitchFamily="34" charset="0"/>
+            </a:endParaRPr>
+          </a:p>
+        </p:txBody>
+      </p:sp>
+      <p:sp>
+        <p:nvSpPr>
+          <p:cNvPr id="3" name="Объект 2">
+            <a:extLst>
+              <a:ext uri="{FF2B5EF4-FFF2-40B4-BE49-F238E27FC236}">
+                <a16:creationId xmlns:a16="http://schemas.microsoft.com/office/drawing/2014/main" id="{0EFAA306-FB7F-5E07-144B-7A348F551356}"/>
+              </a:ext>
+            </a:extLst>
+          </p:cNvPr>
+          <p:cNvSpPr>
+            <a:spLocks noGrp="1"/>
+          </p:cNvSpPr>
+          <p:nvPr>
+            <p:ph idx="1"/>
+          </p:nvPr>
+        </p:nvSpPr>
+        <p:spPr/>
+        <p:txBody>
+          <a:bodyPr>
+            <a:normAutofit fontScale="85000" lnSpcReduction="20000"/>
+          </a:bodyPr>
+          <a:lstStyle/>
+          <a:p>
+            <a:pPr marL="0" indent="0">
+              <a:buNone/>
+            </a:pPr>
+            <a:r>
+              <a:rPr lang="ru-RU" dirty="0"/>
+              <a:t>Способ работы с данными </a:t>
+            </a:r>
+            <a:r>
               <a:rPr lang="en-US" dirty="0" err="1"/>
               <a:t>sessionStorage</a:t>
             </a:r>
-            <a:endParaRPr lang="ru-RU" dirty="0"/>
-          </a:p>
-        </p:txBody>
-      </p:sp>
-      <p:sp>
-        <p:nvSpPr>
-          <p:cNvPr id="3" name="Объект 2">
-            <a:extLst>
-              <a:ext uri="{FF2B5EF4-FFF2-40B4-BE49-F238E27FC236}">
-                <a16:creationId xmlns:a16="http://schemas.microsoft.com/office/drawing/2014/main" id="{0EFAA306-FB7F-5E07-144B-7A348F551356}"/>
-              </a:ext>
-            </a:extLst>
-          </p:cNvPr>
-          <p:cNvSpPr>
-            <a:spLocks noGrp="1"/>
-          </p:cNvSpPr>
-          <p:nvPr>
-            <p:ph idx="1"/>
-          </p:nvPr>
-        </p:nvSpPr>
-        <p:spPr/>
-        <p:txBody>
-          <a:bodyPr>
-            <a:normAutofit fontScale="92500" lnSpcReduction="20000"/>
-          </a:bodyPr>
-          <a:lstStyle/>
-          <a:p>
-            <a:pPr marL="0" indent="0">
-              <a:buNone/>
-            </a:pPr>
-            <a:r>
-              <a:rPr lang="ru-RU" dirty="0"/>
-              <a:t>Способ работы с данными </a:t>
-            </a:r>
-            <a:r>
-              <a:rPr lang="en-US" dirty="0" err="1"/>
-              <a:t>sessionStorage</a:t>
-            </a:r>
             <a:r>
               <a:rPr lang="ru-RU" dirty="0"/>
               <a:t> во многом аналогичен </a:t>
@@ -5846,8 +6818,14 @@
             </a:pPr>
             <a:r>
               <a:rPr lang="ru-RU" dirty="0"/>
-              <a:t>идеален для хранения данных, актуальных в рамках конкретной сессии — например, информации при заполнении формы или вводе данных банковской карты.</a:t>
-            </a:r>
+              <a:t>Идеален для хранения данных, актуальных в рамках конкретной сессии — например, информации при заполнении формы или вводе данных банковской карты.</a:t>
+            </a:r>
+          </a:p>
+          <a:p>
+            <a:pPr marL="0" indent="0">
+              <a:buNone/>
+            </a:pPr>
+            <a:endParaRPr lang="ru-RU" dirty="0"/>
           </a:p>
           <a:p>
             <a:pPr marL="0" indent="0">
@@ -5897,16 +6875,14 @@
             </a:r>
             <a:r>
               <a:rPr lang="en-US" dirty="0"/>
-              <a:t>('test') ); // </a:t>
-            </a:r>
-            <a:r>
-              <a:rPr lang="ru-RU" dirty="0"/>
-              <a:t>после обновления</a:t>
-            </a:r>
-            <a:r>
-              <a:rPr lang="en-US" dirty="0"/>
-              <a:t>: 1</a:t>
-            </a:r>
+              <a:t>('test') ); // 1</a:t>
+            </a:r>
+            <a:endParaRPr lang="ru-RU" dirty="0"/>
+          </a:p>
+          <a:p>
+            <a:pPr marL="0" indent="0">
+              <a:buNone/>
+            </a:pPr>
             <a:endParaRPr lang="ru-RU" dirty="0"/>
           </a:p>
           <a:p>
@@ -5932,7 +6908,7 @@
             </a:r>
             <a:r>
               <a:rPr lang="ru-RU" dirty="0"/>
-              <a:t>, что значит «ничего не найдено».</a:t>
+              <a:t>.</a:t>
             </a:r>
           </a:p>
         </p:txBody>
@@ -5985,11 +6961,25 @@
         </p:nvSpPr>
         <p:spPr/>
         <p:txBody>
-          <a:bodyPr/>
-          <a:lstStyle/>
-          <a:p>
-            <a:r>
-              <a:rPr lang="ru-RU" dirty="0"/>
+          <a:bodyPr>
+            <a:normAutofit/>
+          </a:bodyPr>
+          <a:lstStyle/>
+          <a:p>
+            <a:r>
+              <a:rPr lang="ru-RU" b="1" dirty="0">
+                <a:ln w="22225">
+                  <a:solidFill>
+                    <a:srgbClr val="7030A0"/>
+                  </a:solidFill>
+                  <a:prstDash val="solid"/>
+                </a:ln>
+                <a:solidFill>
+                  <a:srgbClr val="2FCEF9"/>
+                </a:solidFill>
+                <a:latin typeface="Segoe UI" panose="020B0502040204020203" pitchFamily="34" charset="0"/>
+                <a:cs typeface="Segoe UI" panose="020B0502040204020203" pitchFamily="34" charset="0"/>
+              </a:rPr>
               <a:t>Пример кода: </a:t>
             </a:r>
           </a:p>
@@ -6008,13 +6998,20 @@
             <a:spLocks noGrp="1"/>
           </p:cNvSpPr>
           <p:nvPr>
-            <p:ph idx="1"/>
-          </p:nvPr>
-        </p:nvSpPr>
-        <p:spPr/>
+            <p:ph sz="half" idx="1"/>
+          </p:nvPr>
+        </p:nvSpPr>
+        <p:spPr>
+          <a:solidFill>
+            <a:schemeClr val="accent1">
+              <a:lumMod val="20000"/>
+              <a:lumOff val="80000"/>
+            </a:schemeClr>
+          </a:solidFill>
+        </p:spPr>
         <p:txBody>
           <a:bodyPr>
-            <a:normAutofit fontScale="47500" lnSpcReduction="20000"/>
+            <a:normAutofit fontScale="92500" lnSpcReduction="20000"/>
           </a:bodyPr>
           <a:lstStyle/>
           <a:p>
@@ -6022,196 +7019,451 @@
               <a:buNone/>
             </a:pPr>
             <a:r>
-              <a:rPr lang="ru-RU" dirty="0"/>
+              <a:rPr lang="ru-RU" dirty="0">
+                <a:solidFill>
+                  <a:schemeClr val="accent1">
+                    <a:lumMod val="50000"/>
+                  </a:schemeClr>
+                </a:solidFill>
+              </a:rPr>
               <a:t>// </a:t>
             </a:r>
             <a:r>
-              <a:rPr lang="en-US" dirty="0"/>
+              <a:rPr lang="en-US" dirty="0">
+                <a:solidFill>
+                  <a:schemeClr val="accent1">
+                    <a:lumMod val="50000"/>
+                  </a:schemeClr>
+                </a:solidFill>
+              </a:rPr>
               <a:t>Storing data in session storage</a:t>
             </a:r>
-            <a:endParaRPr lang="ru-RU" dirty="0"/>
-          </a:p>
-          <a:p>
-            <a:pPr marL="0" indent="0">
-              <a:buNone/>
-            </a:pPr>
-            <a:r>
-              <a:rPr lang="en-US" dirty="0" err="1"/>
+            <a:endParaRPr lang="ru-RU" dirty="0">
+              <a:solidFill>
+                <a:schemeClr val="accent1">
+                  <a:lumMod val="50000"/>
+                </a:schemeClr>
+              </a:solidFill>
+            </a:endParaRPr>
+          </a:p>
+          <a:p>
+            <a:pPr marL="0" indent="0">
+              <a:buNone/>
+            </a:pPr>
+            <a:r>
+              <a:rPr lang="en-US" dirty="0" err="1">
+                <a:solidFill>
+                  <a:schemeClr val="accent1">
+                    <a:lumMod val="50000"/>
+                  </a:schemeClr>
+                </a:solidFill>
+              </a:rPr>
               <a:t>sessionStorage.setItem</a:t>
             </a:r>
             <a:r>
-              <a:rPr lang="en-US" dirty="0"/>
+              <a:rPr lang="en-US" dirty="0">
+                <a:solidFill>
+                  <a:schemeClr val="accent1">
+                    <a:lumMod val="50000"/>
+                  </a:schemeClr>
+                </a:solidFill>
+              </a:rPr>
               <a:t>("name", "Mathew");</a:t>
             </a:r>
-            <a:endParaRPr lang="ru-RU" dirty="0"/>
-          </a:p>
-          <a:p>
-            <a:pPr marL="0" indent="0">
-              <a:buNone/>
-            </a:pPr>
-            <a:r>
-              <a:rPr lang="en-US" dirty="0" err="1"/>
+            <a:endParaRPr lang="ru-RU" dirty="0">
+              <a:solidFill>
+                <a:schemeClr val="accent1">
+                  <a:lumMod val="50000"/>
+                </a:schemeClr>
+              </a:solidFill>
+            </a:endParaRPr>
+          </a:p>
+          <a:p>
+            <a:pPr marL="0" indent="0">
+              <a:buNone/>
+            </a:pPr>
+            <a:r>
+              <a:rPr lang="en-US" dirty="0" err="1">
+                <a:solidFill>
+                  <a:schemeClr val="accent1">
+                    <a:lumMod val="50000"/>
+                  </a:schemeClr>
+                </a:solidFill>
+              </a:rPr>
               <a:t>sessionStorage.setItem</a:t>
             </a:r>
             <a:r>
-              <a:rPr lang="en-US" dirty="0"/>
+              <a:rPr lang="en-US" dirty="0">
+                <a:solidFill>
+                  <a:schemeClr val="accent1">
+                    <a:lumMod val="50000"/>
+                  </a:schemeClr>
+                </a:solidFill>
+              </a:rPr>
               <a:t>("age", "33");</a:t>
             </a:r>
-            <a:endParaRPr lang="ru-RU" dirty="0"/>
-          </a:p>
-          <a:p>
-            <a:pPr marL="0" indent="0">
-              <a:buNone/>
-            </a:pPr>
-            <a:r>
-              <a:rPr lang="en-US" dirty="0"/>
+            <a:endParaRPr lang="ru-RU" dirty="0">
+              <a:solidFill>
+                <a:schemeClr val="accent1">
+                  <a:lumMod val="50000"/>
+                </a:schemeClr>
+              </a:solidFill>
+            </a:endParaRPr>
+          </a:p>
+          <a:p>
+            <a:pPr marL="0" indent="0">
+              <a:buNone/>
+            </a:pPr>
+            <a:r>
+              <a:rPr lang="en-US" dirty="0">
+                <a:solidFill>
+                  <a:schemeClr val="accent1">
+                    <a:lumMod val="50000"/>
+                  </a:schemeClr>
+                </a:solidFill>
+              </a:rPr>
               <a:t> </a:t>
             </a:r>
-            <a:endParaRPr lang="ru-RU" dirty="0"/>
-          </a:p>
-          <a:p>
-            <a:pPr marL="0" indent="0">
-              <a:buNone/>
-            </a:pPr>
-            <a:r>
-              <a:rPr lang="en-US" dirty="0"/>
+            <a:endParaRPr lang="ru-RU" dirty="0">
+              <a:solidFill>
+                <a:schemeClr val="accent1">
+                  <a:lumMod val="50000"/>
+                </a:schemeClr>
+              </a:solidFill>
+            </a:endParaRPr>
+          </a:p>
+          <a:p>
+            <a:pPr marL="0" indent="0">
+              <a:buNone/>
+            </a:pPr>
+            <a:r>
+              <a:rPr lang="en-US" dirty="0">
+                <a:solidFill>
+                  <a:schemeClr val="accent1">
+                    <a:lumMod val="50000"/>
+                  </a:schemeClr>
+                </a:solidFill>
+              </a:rPr>
               <a:t>// Retrieving data from session storage</a:t>
             </a:r>
-            <a:endParaRPr lang="ru-RU" dirty="0"/>
-          </a:p>
-          <a:p>
-            <a:pPr marL="0" indent="0">
-              <a:buNone/>
-            </a:pPr>
-            <a:r>
-              <a:rPr lang="en-US" dirty="0"/>
+            <a:endParaRPr lang="ru-RU" dirty="0">
+              <a:solidFill>
+                <a:schemeClr val="accent1">
+                  <a:lumMod val="50000"/>
+                </a:schemeClr>
+              </a:solidFill>
+            </a:endParaRPr>
+          </a:p>
+          <a:p>
+            <a:pPr marL="0" indent="0">
+              <a:buNone/>
+            </a:pPr>
+            <a:r>
+              <a:rPr lang="en-US" dirty="0">
+                <a:solidFill>
+                  <a:schemeClr val="accent1">
+                    <a:lumMod val="50000"/>
+                  </a:schemeClr>
+                </a:solidFill>
+              </a:rPr>
               <a:t>const name = </a:t>
             </a:r>
             <a:r>
-              <a:rPr lang="en-US" dirty="0" err="1"/>
+              <a:rPr lang="en-US" dirty="0" err="1">
+                <a:solidFill>
+                  <a:schemeClr val="accent1">
+                    <a:lumMod val="50000"/>
+                  </a:schemeClr>
+                </a:solidFill>
+              </a:rPr>
               <a:t>sessionStorage.getItem</a:t>
             </a:r>
             <a:r>
-              <a:rPr lang="en-US" dirty="0"/>
+              <a:rPr lang="en-US" dirty="0">
+                <a:solidFill>
+                  <a:schemeClr val="accent1">
+                    <a:lumMod val="50000"/>
+                  </a:schemeClr>
+                </a:solidFill>
+              </a:rPr>
               <a:t>("name");</a:t>
             </a:r>
-            <a:endParaRPr lang="ru-RU" dirty="0"/>
-          </a:p>
-          <a:p>
-            <a:pPr marL="0" indent="0">
-              <a:buNone/>
-            </a:pPr>
-            <a:r>
-              <a:rPr lang="en-US" dirty="0"/>
+            <a:endParaRPr lang="ru-RU" dirty="0">
+              <a:solidFill>
+                <a:schemeClr val="accent1">
+                  <a:lumMod val="50000"/>
+                </a:schemeClr>
+              </a:solidFill>
+            </a:endParaRPr>
+          </a:p>
+          <a:p>
+            <a:pPr marL="0" indent="0">
+              <a:buNone/>
+            </a:pPr>
+            <a:r>
+              <a:rPr lang="en-US" dirty="0">
+                <a:solidFill>
+                  <a:schemeClr val="accent1">
+                    <a:lumMod val="50000"/>
+                  </a:schemeClr>
+                </a:solidFill>
+              </a:rPr>
               <a:t>const age = </a:t>
             </a:r>
             <a:r>
-              <a:rPr lang="en-US" dirty="0" err="1"/>
+              <a:rPr lang="en-US" dirty="0" err="1">
+                <a:solidFill>
+                  <a:schemeClr val="accent1">
+                    <a:lumMod val="50000"/>
+                  </a:schemeClr>
+                </a:solidFill>
+              </a:rPr>
               <a:t>sessionStorage.getItem</a:t>
             </a:r>
             <a:r>
-              <a:rPr lang="en-US" dirty="0"/>
+              <a:rPr lang="en-US" dirty="0">
+                <a:solidFill>
+                  <a:schemeClr val="accent1">
+                    <a:lumMod val="50000"/>
+                  </a:schemeClr>
+                </a:solidFill>
+              </a:rPr>
               <a:t>("age");</a:t>
             </a:r>
-            <a:endParaRPr lang="ru-RU" dirty="0"/>
-          </a:p>
-          <a:p>
-            <a:pPr marL="0" indent="0">
-              <a:buNone/>
-            </a:pPr>
-            <a:r>
-              <a:rPr lang="en-US" dirty="0"/>
+            <a:endParaRPr lang="ru-RU" dirty="0">
+              <a:solidFill>
+                <a:schemeClr val="accent1">
+                  <a:lumMod val="50000"/>
+                </a:schemeClr>
+              </a:solidFill>
+            </a:endParaRPr>
+          </a:p>
+        </p:txBody>
+      </p:sp>
+      <p:sp>
+        <p:nvSpPr>
+          <p:cNvPr id="4" name="Объект 3">
+            <a:extLst>
+              <a:ext uri="{FF2B5EF4-FFF2-40B4-BE49-F238E27FC236}">
+                <a16:creationId xmlns:a16="http://schemas.microsoft.com/office/drawing/2014/main" id="{A627CDBF-BB7A-4171-A335-E513D34D112D}"/>
+              </a:ext>
+            </a:extLst>
+          </p:cNvPr>
+          <p:cNvSpPr>
+            <a:spLocks noGrp="1"/>
+          </p:cNvSpPr>
+          <p:nvPr>
+            <p:ph sz="half" idx="2"/>
+          </p:nvPr>
+        </p:nvSpPr>
+        <p:spPr>
+          <a:solidFill>
+            <a:schemeClr val="accent1">
+              <a:lumMod val="20000"/>
+              <a:lumOff val="80000"/>
+            </a:schemeClr>
+          </a:solidFill>
+        </p:spPr>
+        <p:txBody>
+          <a:bodyPr>
+            <a:normAutofit fontScale="92500" lnSpcReduction="20000"/>
+          </a:bodyPr>
+          <a:lstStyle/>
+          <a:p>
+            <a:pPr marL="0" indent="0">
+              <a:buNone/>
+            </a:pPr>
+            <a:r>
+              <a:rPr lang="en-US" dirty="0">
+                <a:solidFill>
+                  <a:schemeClr val="accent1">
+                    <a:lumMod val="50000"/>
+                  </a:schemeClr>
+                </a:solidFill>
+              </a:rPr>
+              <a:t>console.log(name); // Output: Mathew</a:t>
+            </a:r>
+            <a:endParaRPr lang="ru-RU" dirty="0">
+              <a:solidFill>
+                <a:schemeClr val="accent1">
+                  <a:lumMod val="50000"/>
+                </a:schemeClr>
+              </a:solidFill>
+            </a:endParaRPr>
+          </a:p>
+          <a:p>
+            <a:pPr marL="0" indent="0">
+              <a:buNone/>
+            </a:pPr>
+            <a:r>
+              <a:rPr lang="en-US" dirty="0">
+                <a:solidFill>
+                  <a:schemeClr val="accent1">
+                    <a:lumMod val="50000"/>
+                  </a:schemeClr>
+                </a:solidFill>
+              </a:rPr>
+              <a:t>console.log(age); // Output: 33</a:t>
+            </a:r>
+            <a:endParaRPr lang="ru-RU" dirty="0">
+              <a:solidFill>
+                <a:schemeClr val="accent1">
+                  <a:lumMod val="50000"/>
+                </a:schemeClr>
+              </a:solidFill>
+            </a:endParaRPr>
+          </a:p>
+          <a:p>
+            <a:pPr marL="0" indent="0">
+              <a:buNone/>
+            </a:pPr>
+            <a:r>
+              <a:rPr lang="en-US" dirty="0">
+                <a:solidFill>
+                  <a:schemeClr val="accent1">
+                    <a:lumMod val="50000"/>
+                  </a:schemeClr>
+                </a:solidFill>
+              </a:rPr>
               <a:t> </a:t>
             </a:r>
-            <a:endParaRPr lang="ru-RU" dirty="0"/>
-          </a:p>
-          <a:p>
-            <a:pPr marL="0" indent="0">
-              <a:buNone/>
-            </a:pPr>
-            <a:r>
-              <a:rPr lang="en-US" dirty="0"/>
-              <a:t>console.log(name); // Output: Mathew</a:t>
-            </a:r>
-            <a:endParaRPr lang="ru-RU" dirty="0"/>
-          </a:p>
-          <a:p>
-            <a:pPr marL="0" indent="0">
-              <a:buNone/>
-            </a:pPr>
-            <a:r>
-              <a:rPr lang="en-US" dirty="0"/>
-              <a:t>console.log(age); // Output: 33</a:t>
-            </a:r>
-            <a:endParaRPr lang="ru-RU" dirty="0"/>
-          </a:p>
-          <a:p>
-            <a:pPr marL="0" indent="0">
-              <a:buNone/>
-            </a:pPr>
-            <a:r>
-              <a:rPr lang="en-US" dirty="0"/>
+            <a:endParaRPr lang="ru-RU" dirty="0">
+              <a:solidFill>
+                <a:schemeClr val="accent1">
+                  <a:lumMod val="50000"/>
+                </a:schemeClr>
+              </a:solidFill>
+            </a:endParaRPr>
+          </a:p>
+          <a:p>
+            <a:pPr marL="0" indent="0">
+              <a:buNone/>
+            </a:pPr>
+            <a:r>
+              <a:rPr lang="en-US" dirty="0">
+                <a:solidFill>
+                  <a:schemeClr val="accent1">
+                    <a:lumMod val="50000"/>
+                  </a:schemeClr>
+                </a:solidFill>
+              </a:rPr>
+              <a:t>// Removing data from session storage</a:t>
+            </a:r>
+            <a:endParaRPr lang="ru-RU" dirty="0">
+              <a:solidFill>
+                <a:schemeClr val="accent1">
+                  <a:lumMod val="50000"/>
+                </a:schemeClr>
+              </a:solidFill>
+            </a:endParaRPr>
+          </a:p>
+          <a:p>
+            <a:pPr marL="0" indent="0">
+              <a:buNone/>
+            </a:pPr>
+            <a:r>
+              <a:rPr lang="en-US" dirty="0" err="1">
+                <a:solidFill>
+                  <a:schemeClr val="accent1">
+                    <a:lumMod val="50000"/>
+                  </a:schemeClr>
+                </a:solidFill>
+              </a:rPr>
+              <a:t>sessionStorage.removeItem</a:t>
+            </a:r>
+            <a:r>
+              <a:rPr lang="en-US" dirty="0">
+                <a:solidFill>
+                  <a:schemeClr val="accent1">
+                    <a:lumMod val="50000"/>
+                  </a:schemeClr>
+                </a:solidFill>
+              </a:rPr>
+              <a:t>("age");</a:t>
+            </a:r>
+            <a:endParaRPr lang="ru-RU" dirty="0">
+              <a:solidFill>
+                <a:schemeClr val="accent1">
+                  <a:lumMod val="50000"/>
+                </a:schemeClr>
+              </a:solidFill>
+            </a:endParaRPr>
+          </a:p>
+          <a:p>
+            <a:pPr marL="0" indent="0">
+              <a:buNone/>
+            </a:pPr>
+            <a:r>
+              <a:rPr lang="en-US" dirty="0">
+                <a:solidFill>
+                  <a:schemeClr val="accent1">
+                    <a:lumMod val="50000"/>
+                  </a:schemeClr>
+                </a:solidFill>
+              </a:rPr>
               <a:t> </a:t>
             </a:r>
-            <a:endParaRPr lang="ru-RU" dirty="0"/>
-          </a:p>
-          <a:p>
-            <a:pPr marL="0" indent="0">
-              <a:buNone/>
-            </a:pPr>
-            <a:r>
-              <a:rPr lang="en-US" dirty="0"/>
-              <a:t>// Removing data from session storage</a:t>
-            </a:r>
-            <a:endParaRPr lang="ru-RU" dirty="0"/>
-          </a:p>
-          <a:p>
-            <a:pPr marL="0" indent="0">
-              <a:buNone/>
-            </a:pPr>
-            <a:r>
-              <a:rPr lang="en-US" dirty="0" err="1"/>
-              <a:t>sessionStorage.removeItem</a:t>
-            </a:r>
-            <a:r>
-              <a:rPr lang="en-US" dirty="0"/>
-              <a:t>("age");</a:t>
-            </a:r>
-            <a:endParaRPr lang="ru-RU" dirty="0"/>
-          </a:p>
-          <a:p>
-            <a:pPr marL="0" indent="0">
-              <a:buNone/>
-            </a:pPr>
-            <a:r>
-              <a:rPr lang="en-US" dirty="0"/>
-              <a:t> </a:t>
-            </a:r>
-            <a:endParaRPr lang="ru-RU" dirty="0"/>
-          </a:p>
-          <a:p>
-            <a:pPr marL="0" indent="0">
-              <a:buNone/>
-            </a:pPr>
-            <a:r>
-              <a:rPr lang="en-US" dirty="0"/>
+            <a:endParaRPr lang="ru-RU" dirty="0">
+              <a:solidFill>
+                <a:schemeClr val="accent1">
+                  <a:lumMod val="50000"/>
+                </a:schemeClr>
+              </a:solidFill>
+            </a:endParaRPr>
+          </a:p>
+          <a:p>
+            <a:pPr marL="0" indent="0">
+              <a:buNone/>
+            </a:pPr>
+            <a:r>
+              <a:rPr lang="en-US" dirty="0">
+                <a:solidFill>
+                  <a:schemeClr val="accent1">
+                    <a:lumMod val="50000"/>
+                  </a:schemeClr>
+                </a:solidFill>
+              </a:rPr>
               <a:t>// Clearing all data from session storage</a:t>
             </a:r>
-            <a:endParaRPr lang="ru-RU" dirty="0"/>
-          </a:p>
-          <a:p>
-            <a:pPr marL="0" indent="0">
-              <a:buNone/>
-            </a:pPr>
-            <a:r>
-              <a:rPr lang="en-US" dirty="0" err="1"/>
+            <a:endParaRPr lang="ru-RU" dirty="0">
+              <a:solidFill>
+                <a:schemeClr val="accent1">
+                  <a:lumMod val="50000"/>
+                </a:schemeClr>
+              </a:solidFill>
+            </a:endParaRPr>
+          </a:p>
+          <a:p>
+            <a:pPr marL="0" indent="0">
+              <a:buNone/>
+            </a:pPr>
+            <a:r>
+              <a:rPr lang="en-US" dirty="0" err="1">
+                <a:solidFill>
+                  <a:schemeClr val="accent1">
+                    <a:lumMod val="50000"/>
+                  </a:schemeClr>
+                </a:solidFill>
+              </a:rPr>
               <a:t>sessionStorage.clear</a:t>
             </a:r>
             <a:r>
-              <a:rPr lang="en-US" dirty="0"/>
+              <a:rPr lang="en-US" dirty="0">
+                <a:solidFill>
+                  <a:schemeClr val="accent1">
+                    <a:lumMod val="50000"/>
+                  </a:schemeClr>
+                </a:solidFill>
+              </a:rPr>
               <a:t>();</a:t>
             </a:r>
-            <a:endParaRPr lang="ru-RU" dirty="0"/>
+            <a:endParaRPr lang="ru-RU" dirty="0">
+              <a:solidFill>
+                <a:schemeClr val="accent1">
+                  <a:lumMod val="50000"/>
+                </a:schemeClr>
+              </a:solidFill>
+            </a:endParaRPr>
           </a:p>
         </p:txBody>
       </p:sp>
@@ -6223,7 +7475,7 @@
     </p:extLst>
   </p:cSld>
   <p:clrMapOvr>
-    <a:masterClrMapping/>
+    <a:overrideClrMapping bg1="lt1" tx1="dk1" bg2="lt2" tx2="dk2" accent1="accent1" accent2="accent2" accent3="accent3" accent4="accent4" accent5="accent5" accent6="accent6" hlink="hlink" folHlink="folHlink"/>
   </p:clrMapOvr>
 </p:sld>
 </file>
@@ -6521,4 +7773,47 @@
     </a:ext>
   </a:extLst>
 </a:theme>
+</file>
+
+<file path=ppt/theme/themeOverride1.xml><?xml version="1.0" encoding="utf-8"?>
+<a:themeOverride xmlns:a="http://schemas.openxmlformats.org/drawingml/2006/main">
+  <a:clrScheme name="Стандартная">
+    <a:dk1>
+      <a:sysClr val="windowText" lastClr="000000"/>
+    </a:dk1>
+    <a:lt1>
+      <a:sysClr val="window" lastClr="FFFFFF"/>
+    </a:lt1>
+    <a:dk2>
+      <a:srgbClr val="44546A"/>
+    </a:dk2>
+    <a:lt2>
+      <a:srgbClr val="E7E6E6"/>
+    </a:lt2>
+    <a:accent1>
+      <a:srgbClr val="4472C4"/>
+    </a:accent1>
+    <a:accent2>
+      <a:srgbClr val="ED7D31"/>
+    </a:accent2>
+    <a:accent3>
+      <a:srgbClr val="A5A5A5"/>
+    </a:accent3>
+    <a:accent4>
+      <a:srgbClr val="FFC000"/>
+    </a:accent4>
+    <a:accent5>
+      <a:srgbClr val="5B9BD5"/>
+    </a:accent5>
+    <a:accent6>
+      <a:srgbClr val="70AD47"/>
+    </a:accent6>
+    <a:hlink>
+      <a:srgbClr val="0563C1"/>
+    </a:hlink>
+    <a:folHlink>
+      <a:srgbClr val="954F72"/>
+    </a:folHlink>
+  </a:clrScheme>
+</a:themeOverride>
 </file>